--- a/artifacts/intro-decks/element-catalog/deck.pptx
+++ b/artifacts/intro-decks/element-catalog/deck.pptx
@@ -16,9 +16,11 @@
     <p:sldId id="264" r:id="rId10"/>
     <p:sldId id="265" r:id="rId11"/>
     <p:sldId id="266" r:id="rId12"/>
+    <p:sldId id="267" r:id="rId13"/>
+    <p:sldId id="268" r:id="rId14"/>
   </p:sldIdLst>
   <p:notesMasterIdLst>
-    <p:notesMasterId r:id="rId13"/>
+    <p:notesMasterId r:id="rId15"/>
   </p:notesMasterIdLst>
   <p:sldSz cx="12191695" cy="6858000"/>
   <p:notesSz cx="6858000" cy="12191695"/>
@@ -1210,6 +1212,182 @@
 </p:notes>
 </file>
 
+<file path=ppt/notesSlides/notesSlide12.xml><?xml version="1.0" encoding="utf-8"?>
+<p:notes xmlns:a="http://schemas.openxmlformats.org/drawingml/2006/main" xmlns:r="http://schemas.openxmlformats.org/officeDocument/2006/relationships" xmlns:p="http://schemas.openxmlformats.org/presentationml/2006/main">
+  <p:cSld>
+    <p:spTree>
+      <p:nvGrpSpPr>
+        <p:cNvPr id="1" name=""/>
+        <p:cNvGrpSpPr/>
+        <p:nvPr/>
+      </p:nvGrpSpPr>
+      <p:grpSpPr>
+        <a:xfrm>
+          <a:off x="0" y="0"/>
+          <a:ext cx="0" cy="0"/>
+          <a:chOff x="0" y="0"/>
+          <a:chExt cx="0" cy="0"/>
+        </a:xfrm>
+      </p:grpSpPr>
+      <p:sp>
+        <p:nvSpPr>
+          <p:cNvPr id="2" name="Slide Image Placeholder 1"/>
+          <p:cNvSpPr>
+            <a:spLocks noGrp="1" noRot="1" noChangeAspect="1"/>
+          </p:cNvSpPr>
+          <p:nvPr>
+            <p:ph type="sldImg"/>
+          </p:nvPr>
+        </p:nvSpPr>
+        <p:spPr/>
+      </p:sp>
+      <p:sp>
+        <p:nvSpPr>
+          <p:cNvPr id="3" name="Notes Placeholder 2"/>
+          <p:cNvSpPr>
+            <a:spLocks noGrp="1"/>
+          </p:cNvSpPr>
+          <p:nvPr>
+            <p:ph type="body" idx="1"/>
+          </p:nvPr>
+        </p:nvSpPr>
+        <p:spPr/>
+        <p:txBody>
+          <a:bodyPr/>
+          <a:lstStyle/>
+          <a:p>
+            <a:r>
+              <a:rPr lang="en-US" dirty="0"/>
+              <a:t/>
+            </a:r>
+            <a:endParaRPr lang="en-US" dirty="0"/>
+          </a:p>
+        </p:txBody>
+      </p:sp>
+      <p:sp>
+        <p:nvSpPr>
+          <p:cNvPr id="4" name="Slide Number Placeholder 3"/>
+          <p:cNvSpPr>
+            <a:spLocks noGrp="1"/>
+          </p:cNvSpPr>
+          <p:nvPr>
+            <p:ph type="sldNum" sz="quarter" idx="10"/>
+          </p:nvPr>
+        </p:nvSpPr>
+        <p:spPr/>
+        <p:txBody>
+          <a:bodyPr/>
+          <a:lstStyle/>
+          <a:p>
+            <a:fld id="{F7021451-1387-4CA6-816F-3879F97B5CBC}" type="slidenum">
+              <a:rPr lang="en-US"/>
+              <a:t>12</a:t>
+            </a:fld>
+            <a:endParaRPr lang="en-US"/>
+          </a:p>
+        </p:txBody>
+      </p:sp>
+    </p:spTree>
+    <p:extLst>
+      <p:ext uri="{BB962C8B-B14F-4D97-AF65-F5344CB8AC3E}">
+        <p14:creationId xmlns:p14="http://schemas.microsoft.com/office/powerpoint/2010/main" val="1024086991"/>
+      </p:ext>
+    </p:extLst>
+  </p:cSld>
+  <p:clrMapOvr>
+    <a:masterClrMapping/>
+  </p:clrMapOvr>
+</p:notes>
+</file>
+
+<file path=ppt/notesSlides/notesSlide13.xml><?xml version="1.0" encoding="utf-8"?>
+<p:notes xmlns:a="http://schemas.openxmlformats.org/drawingml/2006/main" xmlns:r="http://schemas.openxmlformats.org/officeDocument/2006/relationships" xmlns:p="http://schemas.openxmlformats.org/presentationml/2006/main">
+  <p:cSld>
+    <p:spTree>
+      <p:nvGrpSpPr>
+        <p:cNvPr id="1" name=""/>
+        <p:cNvGrpSpPr/>
+        <p:nvPr/>
+      </p:nvGrpSpPr>
+      <p:grpSpPr>
+        <a:xfrm>
+          <a:off x="0" y="0"/>
+          <a:ext cx="0" cy="0"/>
+          <a:chOff x="0" y="0"/>
+          <a:chExt cx="0" cy="0"/>
+        </a:xfrm>
+      </p:grpSpPr>
+      <p:sp>
+        <p:nvSpPr>
+          <p:cNvPr id="2" name="Slide Image Placeholder 1"/>
+          <p:cNvSpPr>
+            <a:spLocks noGrp="1" noRot="1" noChangeAspect="1"/>
+          </p:cNvSpPr>
+          <p:nvPr>
+            <p:ph type="sldImg"/>
+          </p:nvPr>
+        </p:nvSpPr>
+        <p:spPr/>
+      </p:sp>
+      <p:sp>
+        <p:nvSpPr>
+          <p:cNvPr id="3" name="Notes Placeholder 2"/>
+          <p:cNvSpPr>
+            <a:spLocks noGrp="1"/>
+          </p:cNvSpPr>
+          <p:nvPr>
+            <p:ph type="body" idx="1"/>
+          </p:nvPr>
+        </p:nvSpPr>
+        <p:spPr/>
+        <p:txBody>
+          <a:bodyPr/>
+          <a:lstStyle/>
+          <a:p>
+            <a:r>
+              <a:rPr lang="en-US" dirty="0"/>
+              <a:t/>
+            </a:r>
+            <a:endParaRPr lang="en-US" dirty="0"/>
+          </a:p>
+        </p:txBody>
+      </p:sp>
+      <p:sp>
+        <p:nvSpPr>
+          <p:cNvPr id="4" name="Slide Number Placeholder 3"/>
+          <p:cNvSpPr>
+            <a:spLocks noGrp="1"/>
+          </p:cNvSpPr>
+          <p:nvPr>
+            <p:ph type="sldNum" sz="quarter" idx="10"/>
+          </p:nvPr>
+        </p:nvSpPr>
+        <p:spPr/>
+        <p:txBody>
+          <a:bodyPr/>
+          <a:lstStyle/>
+          <a:p>
+            <a:fld id="{F7021451-1387-4CA6-816F-3879F97B5CBC}" type="slidenum">
+              <a:rPr lang="en-US"/>
+              <a:t>13</a:t>
+            </a:fld>
+            <a:endParaRPr lang="en-US"/>
+          </a:p>
+        </p:txBody>
+      </p:sp>
+    </p:spTree>
+    <p:extLst>
+      <p:ext uri="{BB962C8B-B14F-4D97-AF65-F5344CB8AC3E}">
+        <p14:creationId xmlns:p14="http://schemas.microsoft.com/office/powerpoint/2010/main" val="1024086991"/>
+      </p:ext>
+    </p:extLst>
+  </p:cSld>
+  <p:clrMapOvr>
+    <a:masterClrMapping/>
+  </p:clrMapOvr>
+</p:notes>
+</file>
+
 <file path=ppt/notesSlides/notesSlide2.xml><?xml version="1.0" encoding="utf-8"?>
 <p:notes xmlns:a="http://schemas.openxmlformats.org/drawingml/2006/main" xmlns:r="http://schemas.openxmlformats.org/officeDocument/2006/relationships" xmlns:p="http://schemas.openxmlformats.org/presentationml/2006/main">
   <p:cSld>
@@ -2287,11 +2465,11 @@
             <a:avLst/>
           </a:prstGeom>
           <a:solidFill>
-            <a:srgbClr val="EB4A25"/>
-          </a:solidFill>
-          <a:ln w="12700">
-            <a:solidFill>
-              <a:srgbClr val="EB4A25">
+            <a:srgbClr val="F03A11"/>
+          </a:solidFill>
+          <a:ln w="12700">
+            <a:solidFill>
+              <a:srgbClr val="F03A11">
                 <a:alpha val="0"/>
               </a:srgbClr>
             </a:solidFill>
@@ -2314,11 +2492,11 @@
             <a:avLst/>
           </a:prstGeom>
           <a:solidFill>
-            <a:srgbClr val="C6EB25"/>
-          </a:solidFill>
-          <a:ln w="12700">
-            <a:solidFill>
-              <a:srgbClr val="C6EB25">
+            <a:srgbClr val="C7F015"/>
+          </a:solidFill>
+          <a:ln w="12700">
+            <a:solidFill>
+              <a:srgbClr val="C7F015">
                 <a:alpha val="0"/>
               </a:srgbClr>
             </a:solidFill>
@@ -2341,11 +2519,11 @@
             <a:avLst/>
           </a:prstGeom>
           <a:solidFill>
-            <a:srgbClr val="EB4A25"/>
-          </a:solidFill>
-          <a:ln w="12700">
-            <a:solidFill>
-              <a:srgbClr val="EB4A25">
+            <a:srgbClr val="F03A11"/>
+          </a:solidFill>
+          <a:ln w="12700">
+            <a:solidFill>
+              <a:srgbClr val="F03A11">
                 <a:alpha val="0"/>
               </a:srgbClr>
             </a:solidFill>
@@ -2500,11 +2678,11 @@
             <a:avLst/>
           </a:prstGeom>
           <a:solidFill>
-            <a:srgbClr val="EB4A25"/>
-          </a:solidFill>
-          <a:ln w="12700">
-            <a:solidFill>
-              <a:srgbClr val="EB4A25">
+            <a:srgbClr val="F03A11"/>
+          </a:solidFill>
+          <a:ln w="12700">
+            <a:solidFill>
+              <a:srgbClr val="F03A11">
                 <a:alpha val="0"/>
               </a:srgbClr>
             </a:solidFill>
@@ -2527,11 +2705,11 @@
             <a:avLst/>
           </a:prstGeom>
           <a:solidFill>
-            <a:srgbClr val="C6EB25"/>
-          </a:solidFill>
-          <a:ln w="12700">
-            <a:solidFill>
-              <a:srgbClr val="C6EB25">
+            <a:srgbClr val="C7F015"/>
+          </a:solidFill>
+          <a:ln w="12700">
+            <a:solidFill>
+              <a:srgbClr val="C7F015">
                 <a:alpha val="0"/>
               </a:srgbClr>
             </a:solidFill>
@@ -2796,11 +2974,11 @@
             <a:avLst/>
           </a:prstGeom>
           <a:solidFill>
-            <a:srgbClr val="EB4A25"/>
-          </a:solidFill>
-          <a:ln w="12700">
-            <a:solidFill>
-              <a:srgbClr val="EB4A25">
+            <a:srgbClr val="F03A11"/>
+          </a:solidFill>
+          <a:ln w="12700">
+            <a:solidFill>
+              <a:srgbClr val="F03A11">
                 <a:alpha val="0"/>
               </a:srgbClr>
             </a:solidFill>
@@ -2884,7 +3062,7 @@
             <a:r>
               <a:rPr lang="en-US" sz="2800" b="1" dirty="0">
                 <a:solidFill>
-                  <a:srgbClr val="EB4A25"/>
+                  <a:srgbClr val="F03A11"/>
                 </a:solidFill>
                 <a:latin typeface="Pretendard" pitchFamily="34" charset="0"/>
                 <a:ea typeface="Pretendard" pitchFamily="34" charset="-122"/>
@@ -2938,11 +3116,11 @@
             <a:avLst/>
           </a:prstGeom>
           <a:solidFill>
-            <a:srgbClr val="C6EB25"/>
-          </a:solidFill>
-          <a:ln w="12700">
-            <a:solidFill>
-              <a:srgbClr val="C6EB25">
+            <a:srgbClr val="C7F015"/>
+          </a:solidFill>
+          <a:ln w="12700">
+            <a:solidFill>
+              <a:srgbClr val="C7F015">
                 <a:alpha val="0"/>
               </a:srgbClr>
             </a:solidFill>
@@ -3026,7 +3204,7 @@
             <a:r>
               <a:rPr lang="en-US" sz="2800" b="1" dirty="0">
                 <a:solidFill>
-                  <a:srgbClr val="C6EB25"/>
+                  <a:srgbClr val="C7F015"/>
                 </a:solidFill>
                 <a:latin typeface="Pretendard" pitchFamily="34" charset="0"/>
                 <a:ea typeface="Pretendard" pitchFamily="34" charset="-122"/>
@@ -3055,7 +3233,7 @@
           <a:noFill/>
           <a:ln w="12700">
             <a:solidFill>
-              <a:srgbClr val="C6EB25">
+              <a:srgbClr val="C7F015">
                 <a:alpha val="92000"/>
               </a:srgbClr>
             </a:solidFill>
@@ -3081,7 +3259,7 @@
           <a:noFill/>
           <a:ln w="12700">
             <a:solidFill>
-              <a:srgbClr val="C6EB25">
+              <a:srgbClr val="C7F015">
                 <a:alpha val="92000"/>
               </a:srgbClr>
             </a:solidFill>
@@ -3164,11 +3342,11 @@
             <a:avLst/>
           </a:prstGeom>
           <a:solidFill>
-            <a:srgbClr val="EB4A25"/>
-          </a:solidFill>
-          <a:ln w="12700">
-            <a:solidFill>
-              <a:srgbClr val="EB4A25">
+            <a:srgbClr val="F03A11"/>
+          </a:solidFill>
+          <a:ln w="12700">
+            <a:solidFill>
+              <a:srgbClr val="F03A11">
                 <a:alpha val="0"/>
               </a:srgbClr>
             </a:solidFill>
@@ -3191,11 +3369,1802 @@
             <a:avLst/>
           </a:prstGeom>
           <a:solidFill>
-            <a:srgbClr val="C6EB25"/>
-          </a:solidFill>
-          <a:ln w="12700">
-            <a:solidFill>
-              <a:srgbClr val="C6EB25">
+            <a:srgbClr val="C7F015"/>
+          </a:solidFill>
+          <a:ln w="12700">
+            <a:solidFill>
+              <a:srgbClr val="C7F015">
+                <a:alpha val="0"/>
+              </a:srgbClr>
+            </a:solidFill>
+            <a:prstDash val="solid"/>
+          </a:ln>
+        </p:spPr>
+      </p:sp>
+      <p:sp>
+        <p:nvSpPr>
+          <p:cNvPr id="5" name="Shape 3"/>
+          <p:cNvSpPr/>
+          <p:nvPr/>
+        </p:nvSpPr>
+        <p:spPr>
+          <a:xfrm>
+            <a:off x="914400" y="1417320"/>
+            <a:ext cx="10241280" cy="4343400"/>
+          </a:xfrm>
+          <a:prstGeom prst="roundRect">
+            <a:avLst>
+              <a:gd name="adj" fmla="val 1263"/>
+            </a:avLst>
+          </a:prstGeom>
+          <a:solidFill>
+            <a:srgbClr val="FBFBFB"/>
+          </a:solidFill>
+          <a:ln w="12700">
+            <a:solidFill>
+              <a:srgbClr val="C6CBDA">
+                <a:alpha val="90000"/>
+              </a:srgbClr>
+            </a:solidFill>
+            <a:prstDash val="solid"/>
+          </a:ln>
+        </p:spPr>
+      </p:sp>
+      <p:sp>
+        <p:nvSpPr>
+          <p:cNvPr id="6" name="Text 4"/>
+          <p:cNvSpPr txBox="1"/>
+          <p:nvPr/>
+        </p:nvSpPr>
+        <p:spPr>
+          <a:xfrm>
+            <a:off x="731520" y="457200"/>
+            <a:ext cx="10698480" cy="731520"/>
+          </a:xfrm>
+          <a:prstGeom prst="rect">
+            <a:avLst/>
+          </a:prstGeom>
+          <a:noFill/>
+          <a:ln/>
+        </p:spPr>
+        <p:txBody>
+          <a:bodyPr wrap="square" lIns="0" tIns="0" rIns="0" bIns="0" rtlCol="0" anchor="ctr">
+            <a:normAutofit/>
+          </a:bodyPr>
+          <a:lstStyle/>
+          <a:p>
+            <a:pPr algn="ctr" indent="0" marL="0">
+              <a:lnSpc>
+                <a:spcPct val="120000"/>
+              </a:lnSpc>
+              <a:buNone/>
+            </a:pPr>
+            <a:r>
+              <a:rPr lang="en-US" sz="3400" b="1" dirty="0">
+                <a:solidFill>
+                  <a:srgbClr val="1F2937"/>
+                </a:solidFill>
+                <a:latin typeface="Pretendard" pitchFamily="34" charset="0"/>
+                <a:ea typeface="Pretendard" pitchFamily="34" charset="-122"/>
+                <a:cs typeface="Pretendard" pitchFamily="34" charset="-120"/>
+              </a:rPr>
+              <a:t>Ranked Bars Proof Object</a:t>
+            </a:r>
+            <a:endParaRPr lang="en-US" sz="3400" dirty="0"/>
+          </a:p>
+        </p:txBody>
+      </p:sp>
+      <p:sp>
+        <p:nvSpPr>
+          <p:cNvPr id="7" name="Shape 5"/>
+          <p:cNvSpPr/>
+          <p:nvPr/>
+        </p:nvSpPr>
+        <p:spPr>
+          <a:xfrm>
+            <a:off x="1207008" y="2779776"/>
+            <a:ext cx="310896" cy="310896"/>
+          </a:xfrm>
+          <a:prstGeom prst="ellipse">
+            <a:avLst/>
+          </a:prstGeom>
+          <a:solidFill>
+            <a:srgbClr val="2563EB"/>
+          </a:solidFill>
+          <a:ln w="12700">
+            <a:solidFill>
+              <a:srgbClr val="2563EB">
+                <a:alpha val="0"/>
+              </a:srgbClr>
+            </a:solidFill>
+            <a:prstDash val="solid"/>
+          </a:ln>
+        </p:spPr>
+      </p:sp>
+      <p:sp>
+        <p:nvSpPr>
+          <p:cNvPr id="8" name="Text 6"/>
+          <p:cNvSpPr txBox="1"/>
+          <p:nvPr/>
+        </p:nvSpPr>
+        <p:spPr>
+          <a:xfrm>
+            <a:off x="1207008" y="2779776"/>
+            <a:ext cx="310896" cy="310896"/>
+          </a:xfrm>
+          <a:prstGeom prst="rect">
+            <a:avLst/>
+          </a:prstGeom>
+          <a:noFill/>
+          <a:ln/>
+        </p:spPr>
+        <p:txBody>
+          <a:bodyPr wrap="square" lIns="0" tIns="0" rIns="0" bIns="0" rtlCol="0" anchor="ctr">
+            <a:normAutofit/>
+          </a:bodyPr>
+          <a:lstStyle/>
+          <a:p>
+            <a:pPr algn="ctr" indent="0" marL="0">
+              <a:lnSpc>
+                <a:spcPct val="120000"/>
+              </a:lnSpc>
+              <a:buNone/>
+            </a:pPr>
+            <a:r>
+              <a:rPr lang="en-US" sz="1100" b="1" dirty="0">
+                <a:solidFill>
+                  <a:srgbClr val="FFFFFF"/>
+                </a:solidFill>
+                <a:latin typeface="Pretendard" pitchFamily="34" charset="0"/>
+                <a:ea typeface="Pretendard" pitchFamily="34" charset="-122"/>
+                <a:cs typeface="Pretendard" pitchFamily="34" charset="-120"/>
+              </a:rPr>
+              <a:t>1</a:t>
+            </a:r>
+            <a:endParaRPr lang="en-US" sz="1100" dirty="0"/>
+          </a:p>
+        </p:txBody>
+      </p:sp>
+      <p:sp>
+        <p:nvSpPr>
+          <p:cNvPr id="9" name="Text 7"/>
+          <p:cNvSpPr txBox="1"/>
+          <p:nvPr/>
+        </p:nvSpPr>
+        <p:spPr>
+          <a:xfrm>
+            <a:off x="1627632" y="2651760"/>
+            <a:ext cx="1591056" cy="566928"/>
+          </a:xfrm>
+          <a:prstGeom prst="rect">
+            <a:avLst/>
+          </a:prstGeom>
+          <a:noFill/>
+          <a:ln/>
+        </p:spPr>
+        <p:txBody>
+          <a:bodyPr wrap="square" lIns="0" tIns="0" rIns="0" bIns="0" rtlCol="0" anchor="ctr">
+            <a:normAutofit/>
+          </a:bodyPr>
+          <a:lstStyle/>
+          <a:p>
+            <a:pPr algn="l" indent="0" marL="0">
+              <a:lnSpc>
+                <a:spcPct val="120000"/>
+              </a:lnSpc>
+              <a:buNone/>
+            </a:pPr>
+            <a:r>
+              <a:rPr lang="en-US" sz="1700" b="1" dirty="0">
+                <a:solidFill>
+                  <a:srgbClr val="1F2937"/>
+                </a:solidFill>
+                <a:latin typeface="Pretendard" pitchFamily="34" charset="0"/>
+                <a:ea typeface="Pretendard" pitchFamily="34" charset="-122"/>
+                <a:cs typeface="Pretendard" pitchFamily="34" charset="-120"/>
+              </a:rPr>
+              <a:t>Renderer</a:t>
+            </a:r>
+            <a:endParaRPr lang="en-US" sz="1700" dirty="0"/>
+          </a:p>
+        </p:txBody>
+      </p:sp>
+      <p:sp>
+        <p:nvSpPr>
+          <p:cNvPr id="10" name="Shape 8"/>
+          <p:cNvSpPr/>
+          <p:nvPr/>
+        </p:nvSpPr>
+        <p:spPr>
+          <a:xfrm>
+            <a:off x="3511296" y="2844516"/>
+            <a:ext cx="7141464" cy="181417"/>
+          </a:xfrm>
+          <a:prstGeom prst="roundRect">
+            <a:avLst>
+              <a:gd name="adj" fmla="val 25202"/>
+            </a:avLst>
+          </a:prstGeom>
+          <a:solidFill>
+            <a:srgbClr val="C6CBDA">
+              <a:alpha val="78000"/>
+            </a:srgbClr>
+          </a:solidFill>
+          <a:ln w="12700">
+            <a:solidFill>
+              <a:srgbClr val="C6CBDA">
+                <a:alpha val="0"/>
+              </a:srgbClr>
+            </a:solidFill>
+            <a:prstDash val="solid"/>
+          </a:ln>
+        </p:spPr>
+      </p:sp>
+      <p:sp>
+        <p:nvSpPr>
+          <p:cNvPr id="11" name="Shape 9"/>
+          <p:cNvSpPr/>
+          <p:nvPr/>
+        </p:nvSpPr>
+        <p:spPr>
+          <a:xfrm>
+            <a:off x="3511296" y="2844516"/>
+            <a:ext cx="7141464" cy="181417"/>
+          </a:xfrm>
+          <a:prstGeom prst="roundRect">
+            <a:avLst>
+              <a:gd name="adj" fmla="val 25202"/>
+            </a:avLst>
+          </a:prstGeom>
+          <a:solidFill>
+            <a:srgbClr val="2563EB"/>
+          </a:solidFill>
+          <a:ln w="12700">
+            <a:solidFill>
+              <a:srgbClr val="2563EB">
+                <a:alpha val="0"/>
+              </a:srgbClr>
+            </a:solidFill>
+            <a:prstDash val="solid"/>
+          </a:ln>
+        </p:spPr>
+      </p:sp>
+      <p:sp>
+        <p:nvSpPr>
+          <p:cNvPr id="12" name="Text 10"/>
+          <p:cNvSpPr txBox="1"/>
+          <p:nvPr/>
+        </p:nvSpPr>
+        <p:spPr>
+          <a:xfrm>
+            <a:off x="10725912" y="2651760"/>
+            <a:ext cx="438912" cy="566928"/>
+          </a:xfrm>
+          <a:prstGeom prst="rect">
+            <a:avLst/>
+          </a:prstGeom>
+          <a:noFill/>
+          <a:ln/>
+        </p:spPr>
+        <p:txBody>
+          <a:bodyPr wrap="square" lIns="0" tIns="0" rIns="0" bIns="0" rtlCol="0" anchor="ctr">
+            <a:normAutofit/>
+          </a:bodyPr>
+          <a:lstStyle/>
+          <a:p>
+            <a:pPr algn="r" indent="0" marL="0">
+              <a:lnSpc>
+                <a:spcPct val="120000"/>
+              </a:lnSpc>
+              <a:buNone/>
+            </a:pPr>
+            <a:r>
+              <a:rPr lang="en-US" sz="1600" b="1" dirty="0">
+                <a:solidFill>
+                  <a:srgbClr val="2563EB"/>
+                </a:solidFill>
+                <a:latin typeface="Pretendard" pitchFamily="34" charset="0"/>
+                <a:ea typeface="Pretendard" pitchFamily="34" charset="-122"/>
+                <a:cs typeface="Pretendard" pitchFamily="34" charset="-120"/>
+              </a:rPr>
+              <a:t>94%</a:t>
+            </a:r>
+            <a:endParaRPr lang="en-US" sz="1600" dirty="0"/>
+          </a:p>
+        </p:txBody>
+      </p:sp>
+      <p:sp>
+        <p:nvSpPr>
+          <p:cNvPr id="13" name="Shape 11"/>
+          <p:cNvSpPr/>
+          <p:nvPr/>
+        </p:nvSpPr>
+        <p:spPr>
+          <a:xfrm>
+            <a:off x="1207008" y="3433572"/>
+            <a:ext cx="310896" cy="310896"/>
+          </a:xfrm>
+          <a:prstGeom prst="ellipse">
+            <a:avLst/>
+          </a:prstGeom>
+          <a:solidFill>
+            <a:srgbClr val="F03A11"/>
+          </a:solidFill>
+          <a:ln w="12700">
+            <a:solidFill>
+              <a:srgbClr val="F03A11">
+                <a:alpha val="0"/>
+              </a:srgbClr>
+            </a:solidFill>
+            <a:prstDash val="solid"/>
+          </a:ln>
+        </p:spPr>
+      </p:sp>
+      <p:sp>
+        <p:nvSpPr>
+          <p:cNvPr id="14" name="Text 12"/>
+          <p:cNvSpPr txBox="1"/>
+          <p:nvPr/>
+        </p:nvSpPr>
+        <p:spPr>
+          <a:xfrm>
+            <a:off x="1207008" y="3433572"/>
+            <a:ext cx="310896" cy="310896"/>
+          </a:xfrm>
+          <a:prstGeom prst="rect">
+            <a:avLst/>
+          </a:prstGeom>
+          <a:noFill/>
+          <a:ln/>
+        </p:spPr>
+        <p:txBody>
+          <a:bodyPr wrap="square" lIns="0" tIns="0" rIns="0" bIns="0" rtlCol="0" anchor="ctr">
+            <a:normAutofit/>
+          </a:bodyPr>
+          <a:lstStyle/>
+          <a:p>
+            <a:pPr algn="ctr" indent="0" marL="0">
+              <a:lnSpc>
+                <a:spcPct val="120000"/>
+              </a:lnSpc>
+              <a:buNone/>
+            </a:pPr>
+            <a:r>
+              <a:rPr lang="en-US" sz="1100" b="1" dirty="0">
+                <a:solidFill>
+                  <a:srgbClr val="FFFFFF"/>
+                </a:solidFill>
+                <a:latin typeface="Pretendard" pitchFamily="34" charset="0"/>
+                <a:ea typeface="Pretendard" pitchFamily="34" charset="-122"/>
+                <a:cs typeface="Pretendard" pitchFamily="34" charset="-120"/>
+              </a:rPr>
+              <a:t>2</a:t>
+            </a:r>
+            <a:endParaRPr lang="en-US" sz="1100" dirty="0"/>
+          </a:p>
+        </p:txBody>
+      </p:sp>
+      <p:sp>
+        <p:nvSpPr>
+          <p:cNvPr id="15" name="Text 13"/>
+          <p:cNvSpPr txBox="1"/>
+          <p:nvPr/>
+        </p:nvSpPr>
+        <p:spPr>
+          <a:xfrm>
+            <a:off x="1627632" y="3305556"/>
+            <a:ext cx="1591056" cy="566928"/>
+          </a:xfrm>
+          <a:prstGeom prst="rect">
+            <a:avLst/>
+          </a:prstGeom>
+          <a:noFill/>
+          <a:ln/>
+        </p:spPr>
+        <p:txBody>
+          <a:bodyPr wrap="square" lIns="0" tIns="0" rIns="0" bIns="0" rtlCol="0" anchor="ctr">
+            <a:normAutofit/>
+          </a:bodyPr>
+          <a:lstStyle/>
+          <a:p>
+            <a:pPr algn="l" indent="0" marL="0">
+              <a:lnSpc>
+                <a:spcPct val="120000"/>
+              </a:lnSpc>
+              <a:buNone/>
+            </a:pPr>
+            <a:r>
+              <a:rPr lang="en-US" sz="1700" dirty="0">
+                <a:solidFill>
+                  <a:srgbClr val="1F2937"/>
+                </a:solidFill>
+                <a:latin typeface="Pretendard" pitchFamily="34" charset="0"/>
+                <a:ea typeface="Pretendard" pitchFamily="34" charset="-122"/>
+                <a:cs typeface="Pretendard" pitchFamily="34" charset="-120"/>
+              </a:rPr>
+              <a:t>Parser</a:t>
+            </a:r>
+            <a:endParaRPr lang="en-US" sz="1700" dirty="0"/>
+          </a:p>
+        </p:txBody>
+      </p:sp>
+      <p:sp>
+        <p:nvSpPr>
+          <p:cNvPr id="16" name="Shape 14"/>
+          <p:cNvSpPr/>
+          <p:nvPr/>
+        </p:nvSpPr>
+        <p:spPr>
+          <a:xfrm>
+            <a:off x="3511296" y="3498312"/>
+            <a:ext cx="7141464" cy="181417"/>
+          </a:xfrm>
+          <a:prstGeom prst="roundRect">
+            <a:avLst>
+              <a:gd name="adj" fmla="val 25202"/>
+            </a:avLst>
+          </a:prstGeom>
+          <a:solidFill>
+            <a:srgbClr val="C6CBDA">
+              <a:alpha val="78000"/>
+            </a:srgbClr>
+          </a:solidFill>
+          <a:ln w="12700">
+            <a:solidFill>
+              <a:srgbClr val="C6CBDA">
+                <a:alpha val="0"/>
+              </a:srgbClr>
+            </a:solidFill>
+            <a:prstDash val="solid"/>
+          </a:ln>
+        </p:spPr>
+      </p:sp>
+      <p:sp>
+        <p:nvSpPr>
+          <p:cNvPr id="17" name="Shape 15"/>
+          <p:cNvSpPr/>
+          <p:nvPr/>
+        </p:nvSpPr>
+        <p:spPr>
+          <a:xfrm>
+            <a:off x="3511296" y="3498312"/>
+            <a:ext cx="6913545" cy="181417"/>
+          </a:xfrm>
+          <a:prstGeom prst="roundRect">
+            <a:avLst>
+              <a:gd name="adj" fmla="val 25202"/>
+            </a:avLst>
+          </a:prstGeom>
+          <a:solidFill>
+            <a:srgbClr val="F03A11"/>
+          </a:solidFill>
+          <a:ln w="12700">
+            <a:solidFill>
+              <a:srgbClr val="F03A11">
+                <a:alpha val="0"/>
+              </a:srgbClr>
+            </a:solidFill>
+            <a:prstDash val="solid"/>
+          </a:ln>
+        </p:spPr>
+      </p:sp>
+      <p:sp>
+        <p:nvSpPr>
+          <p:cNvPr id="18" name="Text 16"/>
+          <p:cNvSpPr txBox="1"/>
+          <p:nvPr/>
+        </p:nvSpPr>
+        <p:spPr>
+          <a:xfrm>
+            <a:off x="10725912" y="3305556"/>
+            <a:ext cx="438912" cy="566928"/>
+          </a:xfrm>
+          <a:prstGeom prst="rect">
+            <a:avLst/>
+          </a:prstGeom>
+          <a:noFill/>
+          <a:ln/>
+        </p:spPr>
+        <p:txBody>
+          <a:bodyPr wrap="square" lIns="0" tIns="0" rIns="0" bIns="0" rtlCol="0" anchor="ctr">
+            <a:normAutofit/>
+          </a:bodyPr>
+          <a:lstStyle/>
+          <a:p>
+            <a:pPr algn="r" indent="0" marL="0">
+              <a:lnSpc>
+                <a:spcPct val="120000"/>
+              </a:lnSpc>
+              <a:buNone/>
+            </a:pPr>
+            <a:r>
+              <a:rPr lang="en-US" sz="1600" b="1" dirty="0">
+                <a:solidFill>
+                  <a:srgbClr val="F03A11"/>
+                </a:solidFill>
+                <a:latin typeface="Pretendard" pitchFamily="34" charset="0"/>
+                <a:ea typeface="Pretendard" pitchFamily="34" charset="-122"/>
+                <a:cs typeface="Pretendard" pitchFamily="34" charset="-120"/>
+              </a:rPr>
+              <a:t>91%</a:t>
+            </a:r>
+            <a:endParaRPr lang="en-US" sz="1600" dirty="0"/>
+          </a:p>
+        </p:txBody>
+      </p:sp>
+      <p:sp>
+        <p:nvSpPr>
+          <p:cNvPr id="19" name="Shape 17"/>
+          <p:cNvSpPr/>
+          <p:nvPr/>
+        </p:nvSpPr>
+        <p:spPr>
+          <a:xfrm>
+            <a:off x="1207008" y="4087368"/>
+            <a:ext cx="310896" cy="310896"/>
+          </a:xfrm>
+          <a:prstGeom prst="ellipse">
+            <a:avLst/>
+          </a:prstGeom>
+          <a:solidFill>
+            <a:srgbClr val="C7F015"/>
+          </a:solidFill>
+          <a:ln w="12700">
+            <a:solidFill>
+              <a:srgbClr val="C7F015">
+                <a:alpha val="0"/>
+              </a:srgbClr>
+            </a:solidFill>
+            <a:prstDash val="solid"/>
+          </a:ln>
+        </p:spPr>
+      </p:sp>
+      <p:sp>
+        <p:nvSpPr>
+          <p:cNvPr id="20" name="Text 18"/>
+          <p:cNvSpPr txBox="1"/>
+          <p:nvPr/>
+        </p:nvSpPr>
+        <p:spPr>
+          <a:xfrm>
+            <a:off x="1207008" y="4087368"/>
+            <a:ext cx="310896" cy="310896"/>
+          </a:xfrm>
+          <a:prstGeom prst="rect">
+            <a:avLst/>
+          </a:prstGeom>
+          <a:noFill/>
+          <a:ln/>
+        </p:spPr>
+        <p:txBody>
+          <a:bodyPr wrap="square" lIns="0" tIns="0" rIns="0" bIns="0" rtlCol="0" anchor="ctr">
+            <a:normAutofit/>
+          </a:bodyPr>
+          <a:lstStyle/>
+          <a:p>
+            <a:pPr algn="ctr" indent="0" marL="0">
+              <a:lnSpc>
+                <a:spcPct val="120000"/>
+              </a:lnSpc>
+              <a:buNone/>
+            </a:pPr>
+            <a:r>
+              <a:rPr lang="en-US" sz="1100" b="1" dirty="0">
+                <a:solidFill>
+                  <a:srgbClr val="111827"/>
+                </a:solidFill>
+                <a:latin typeface="Pretendard" pitchFamily="34" charset="0"/>
+                <a:ea typeface="Pretendard" pitchFamily="34" charset="-122"/>
+                <a:cs typeface="Pretendard" pitchFamily="34" charset="-120"/>
+              </a:rPr>
+              <a:t>3</a:t>
+            </a:r>
+            <a:endParaRPr lang="en-US" sz="1100" dirty="0"/>
+          </a:p>
+        </p:txBody>
+      </p:sp>
+      <p:sp>
+        <p:nvSpPr>
+          <p:cNvPr id="21" name="Text 19"/>
+          <p:cNvSpPr txBox="1"/>
+          <p:nvPr/>
+        </p:nvSpPr>
+        <p:spPr>
+          <a:xfrm>
+            <a:off x="1627632" y="3959352"/>
+            <a:ext cx="1591056" cy="566928"/>
+          </a:xfrm>
+          <a:prstGeom prst="rect">
+            <a:avLst/>
+          </a:prstGeom>
+          <a:noFill/>
+          <a:ln/>
+        </p:spPr>
+        <p:txBody>
+          <a:bodyPr wrap="square" lIns="0" tIns="0" rIns="0" bIns="0" rtlCol="0" anchor="ctr">
+            <a:normAutofit/>
+          </a:bodyPr>
+          <a:lstStyle/>
+          <a:p>
+            <a:pPr algn="l" indent="0" marL="0">
+              <a:lnSpc>
+                <a:spcPct val="120000"/>
+              </a:lnSpc>
+              <a:buNone/>
+            </a:pPr>
+            <a:r>
+              <a:rPr lang="en-US" sz="1700" dirty="0">
+                <a:solidFill>
+                  <a:srgbClr val="1F2937"/>
+                </a:solidFill>
+                <a:latin typeface="Pretendard" pitchFamily="34" charset="0"/>
+                <a:ea typeface="Pretendard" pitchFamily="34" charset="-122"/>
+                <a:cs typeface="Pretendard" pitchFamily="34" charset="-120"/>
+              </a:rPr>
+              <a:t>Layout</a:t>
+            </a:r>
+            <a:endParaRPr lang="en-US" sz="1700" dirty="0"/>
+          </a:p>
+        </p:txBody>
+      </p:sp>
+      <p:sp>
+        <p:nvSpPr>
+          <p:cNvPr id="22" name="Shape 20"/>
+          <p:cNvSpPr/>
+          <p:nvPr/>
+        </p:nvSpPr>
+        <p:spPr>
+          <a:xfrm>
+            <a:off x="3511296" y="4152108"/>
+            <a:ext cx="7141464" cy="181417"/>
+          </a:xfrm>
+          <a:prstGeom prst="roundRect">
+            <a:avLst>
+              <a:gd name="adj" fmla="val 25202"/>
+            </a:avLst>
+          </a:prstGeom>
+          <a:solidFill>
+            <a:srgbClr val="C6CBDA">
+              <a:alpha val="78000"/>
+            </a:srgbClr>
+          </a:solidFill>
+          <a:ln w="12700">
+            <a:solidFill>
+              <a:srgbClr val="C6CBDA">
+                <a:alpha val="0"/>
+              </a:srgbClr>
+            </a:solidFill>
+            <a:prstDash val="solid"/>
+          </a:ln>
+        </p:spPr>
+      </p:sp>
+      <p:sp>
+        <p:nvSpPr>
+          <p:cNvPr id="23" name="Shape 21"/>
+          <p:cNvSpPr/>
+          <p:nvPr/>
+        </p:nvSpPr>
+        <p:spPr>
+          <a:xfrm>
+            <a:off x="3511296" y="4152108"/>
+            <a:ext cx="6609653" cy="181417"/>
+          </a:xfrm>
+          <a:prstGeom prst="roundRect">
+            <a:avLst>
+              <a:gd name="adj" fmla="val 25202"/>
+            </a:avLst>
+          </a:prstGeom>
+          <a:solidFill>
+            <a:srgbClr val="C7F015"/>
+          </a:solidFill>
+          <a:ln w="12700">
+            <a:solidFill>
+              <a:srgbClr val="C7F015">
+                <a:alpha val="0"/>
+              </a:srgbClr>
+            </a:solidFill>
+            <a:prstDash val="solid"/>
+          </a:ln>
+        </p:spPr>
+      </p:sp>
+      <p:sp>
+        <p:nvSpPr>
+          <p:cNvPr id="24" name="Text 22"/>
+          <p:cNvSpPr txBox="1"/>
+          <p:nvPr/>
+        </p:nvSpPr>
+        <p:spPr>
+          <a:xfrm>
+            <a:off x="10725912" y="3959352"/>
+            <a:ext cx="438912" cy="566928"/>
+          </a:xfrm>
+          <a:prstGeom prst="rect">
+            <a:avLst/>
+          </a:prstGeom>
+          <a:noFill/>
+          <a:ln/>
+        </p:spPr>
+        <p:txBody>
+          <a:bodyPr wrap="square" lIns="0" tIns="0" rIns="0" bIns="0" rtlCol="0" anchor="ctr">
+            <a:normAutofit/>
+          </a:bodyPr>
+          <a:lstStyle/>
+          <a:p>
+            <a:pPr algn="r" indent="0" marL="0">
+              <a:lnSpc>
+                <a:spcPct val="120000"/>
+              </a:lnSpc>
+              <a:buNone/>
+            </a:pPr>
+            <a:r>
+              <a:rPr lang="en-US" sz="1600" b="1" dirty="0">
+                <a:solidFill>
+                  <a:srgbClr val="C7F015"/>
+                </a:solidFill>
+                <a:latin typeface="Pretendard" pitchFamily="34" charset="0"/>
+                <a:ea typeface="Pretendard" pitchFamily="34" charset="-122"/>
+                <a:cs typeface="Pretendard" pitchFamily="34" charset="-120"/>
+              </a:rPr>
+              <a:t>87%</a:t>
+            </a:r>
+            <a:endParaRPr lang="en-US" sz="1600" dirty="0"/>
+          </a:p>
+        </p:txBody>
+      </p:sp>
+    </p:spTree>
+  </p:cSld>
+  <p:clrMapOvr>
+    <a:masterClrMapping/>
+  </p:clrMapOvr>
+</p:sld>
+</file>
+
+<file path=ppt/slides/slide12.xml><?xml version="1.0" encoding="utf-8"?>
+<p:sld xmlns:a="http://schemas.openxmlformats.org/drawingml/2006/main" xmlns:r="http://schemas.openxmlformats.org/officeDocument/2006/relationships" xmlns:p="http://schemas.openxmlformats.org/presentationml/2006/main">
+  <p:cSld name="Slide 12">
+    <p:bg>
+      <p:bgPr>
+        <a:solidFill>
+          <a:srgbClr val="FFFFFF"/>
+        </a:solidFill>
+      </p:bgPr>
+    </p:bg>
+    <p:spTree>
+      <p:nvGrpSpPr>
+        <p:cNvPr id="1" name=""/>
+        <p:cNvGrpSpPr/>
+        <p:nvPr/>
+      </p:nvGrpSpPr>
+      <p:grpSpPr>
+        <a:xfrm>
+          <a:off x="0" y="0"/>
+          <a:ext cx="0" cy="0"/>
+          <a:chOff x="0" y="0"/>
+          <a:chExt cx="0" cy="0"/>
+        </a:xfrm>
+      </p:grpSpPr>
+      <p:sp>
+        <p:nvSpPr>
+          <p:cNvPr id="2" name="Shape 0"/>
+          <p:cNvSpPr/>
+          <p:nvPr/>
+        </p:nvSpPr>
+        <p:spPr>
+          <a:xfrm>
+            <a:off x="10134295" y="0"/>
+            <a:ext cx="2057400" cy="256032"/>
+          </a:xfrm>
+          <a:prstGeom prst="rect">
+            <a:avLst/>
+          </a:prstGeom>
+          <a:solidFill>
+            <a:srgbClr val="2563EB"/>
+          </a:solidFill>
+          <a:ln w="12700">
+            <a:solidFill>
+              <a:srgbClr val="2563EB">
+                <a:alpha val="0"/>
+              </a:srgbClr>
+            </a:solidFill>
+            <a:prstDash val="solid"/>
+          </a:ln>
+        </p:spPr>
+      </p:sp>
+      <p:sp>
+        <p:nvSpPr>
+          <p:cNvPr id="3" name="Shape 1"/>
+          <p:cNvSpPr/>
+          <p:nvPr/>
+        </p:nvSpPr>
+        <p:spPr>
+          <a:xfrm>
+            <a:off x="11048695" y="256032"/>
+            <a:ext cx="1143000" cy="73152"/>
+          </a:xfrm>
+          <a:prstGeom prst="rect">
+            <a:avLst/>
+          </a:prstGeom>
+          <a:solidFill>
+            <a:srgbClr val="F03A11"/>
+          </a:solidFill>
+          <a:ln w="12700">
+            <a:solidFill>
+              <a:srgbClr val="F03A11">
+                <a:alpha val="0"/>
+              </a:srgbClr>
+            </a:solidFill>
+            <a:prstDash val="solid"/>
+          </a:ln>
+        </p:spPr>
+      </p:sp>
+      <p:sp>
+        <p:nvSpPr>
+          <p:cNvPr id="4" name="Shape 2"/>
+          <p:cNvSpPr/>
+          <p:nvPr/>
+        </p:nvSpPr>
+        <p:spPr>
+          <a:xfrm>
+            <a:off x="731520" y="1207008"/>
+            <a:ext cx="1325880" cy="54864"/>
+          </a:xfrm>
+          <a:prstGeom prst="rect">
+            <a:avLst/>
+          </a:prstGeom>
+          <a:solidFill>
+            <a:srgbClr val="C7F015"/>
+          </a:solidFill>
+          <a:ln w="12700">
+            <a:solidFill>
+              <a:srgbClr val="C7F015">
+                <a:alpha val="0"/>
+              </a:srgbClr>
+            </a:solidFill>
+            <a:prstDash val="solid"/>
+          </a:ln>
+        </p:spPr>
+      </p:sp>
+      <p:sp>
+        <p:nvSpPr>
+          <p:cNvPr id="5" name="Shape 3"/>
+          <p:cNvSpPr/>
+          <p:nvPr/>
+        </p:nvSpPr>
+        <p:spPr>
+          <a:xfrm>
+            <a:off x="914400" y="1417320"/>
+            <a:ext cx="10241280" cy="4343400"/>
+          </a:xfrm>
+          <a:prstGeom prst="roundRect">
+            <a:avLst>
+              <a:gd name="adj" fmla="val 1263"/>
+            </a:avLst>
+          </a:prstGeom>
+          <a:solidFill>
+            <a:srgbClr val="FBFBFB"/>
+          </a:solidFill>
+          <a:ln w="12700">
+            <a:solidFill>
+              <a:srgbClr val="C6CBDA">
+                <a:alpha val="90000"/>
+              </a:srgbClr>
+            </a:solidFill>
+            <a:prstDash val="solid"/>
+          </a:ln>
+        </p:spPr>
+      </p:sp>
+      <p:sp>
+        <p:nvSpPr>
+          <p:cNvPr id="6" name="Text 4"/>
+          <p:cNvSpPr txBox="1"/>
+          <p:nvPr/>
+        </p:nvSpPr>
+        <p:spPr>
+          <a:xfrm>
+            <a:off x="731520" y="457200"/>
+            <a:ext cx="10698480" cy="731520"/>
+          </a:xfrm>
+          <a:prstGeom prst="rect">
+            <a:avLst/>
+          </a:prstGeom>
+          <a:noFill/>
+          <a:ln/>
+        </p:spPr>
+        <p:txBody>
+          <a:bodyPr wrap="square" lIns="0" tIns="0" rIns="0" bIns="0" rtlCol="0" anchor="ctr">
+            <a:normAutofit/>
+          </a:bodyPr>
+          <a:lstStyle/>
+          <a:p>
+            <a:pPr algn="ctr" indent="0" marL="0">
+              <a:lnSpc>
+                <a:spcPct val="120000"/>
+              </a:lnSpc>
+              <a:buNone/>
+            </a:pPr>
+            <a:r>
+              <a:rPr lang="en-US" sz="3400" b="1" dirty="0">
+                <a:solidFill>
+                  <a:srgbClr val="1F2937"/>
+                </a:solidFill>
+                <a:latin typeface="Pretendard" pitchFamily="34" charset="0"/>
+                <a:ea typeface="Pretendard" pitchFamily="34" charset="-122"/>
+                <a:cs typeface="Pretendard" pitchFamily="34" charset="-120"/>
+              </a:rPr>
+              <a:t>Metric Dots Proof Object</a:t>
+            </a:r>
+            <a:endParaRPr lang="en-US" sz="3400" dirty="0"/>
+          </a:p>
+        </p:txBody>
+      </p:sp>
+      <p:sp>
+        <p:nvSpPr>
+          <p:cNvPr id="7" name="Shape 5"/>
+          <p:cNvSpPr/>
+          <p:nvPr/>
+        </p:nvSpPr>
+        <p:spPr>
+          <a:xfrm>
+            <a:off x="3876142" y="2350008"/>
+            <a:ext cx="1234440" cy="2519172"/>
+          </a:xfrm>
+          <a:prstGeom prst="roundRect">
+            <a:avLst>
+              <a:gd name="adj" fmla="val 4444"/>
+            </a:avLst>
+          </a:prstGeom>
+          <a:solidFill>
+            <a:srgbClr val="FBFBFB"/>
+          </a:solidFill>
+          <a:ln w="12700">
+            <a:solidFill>
+              <a:srgbClr val="C6CBDA"/>
+            </a:solidFill>
+            <a:prstDash val="solid"/>
+          </a:ln>
+        </p:spPr>
+      </p:sp>
+      <p:sp>
+        <p:nvSpPr>
+          <p:cNvPr id="8" name="Shape 6"/>
+          <p:cNvSpPr/>
+          <p:nvPr/>
+        </p:nvSpPr>
+        <p:spPr>
+          <a:xfrm>
+            <a:off x="4237330" y="2459736"/>
+            <a:ext cx="512064" cy="512064"/>
+          </a:xfrm>
+          <a:prstGeom prst="ellipse">
+            <a:avLst/>
+          </a:prstGeom>
+          <a:solidFill>
+            <a:srgbClr val="2563EB"/>
+          </a:solidFill>
+          <a:ln w="12700">
+            <a:solidFill>
+              <a:srgbClr val="2563EB">
+                <a:alpha val="0"/>
+              </a:srgbClr>
+            </a:solidFill>
+            <a:prstDash val="solid"/>
+          </a:ln>
+        </p:spPr>
+      </p:sp>
+      <p:sp>
+        <p:nvSpPr>
+          <p:cNvPr id="9" name="Shape 7"/>
+          <p:cNvSpPr/>
+          <p:nvPr/>
+        </p:nvSpPr>
+        <p:spPr>
+          <a:xfrm>
+            <a:off x="4237330" y="2726009"/>
+            <a:ext cx="512064" cy="512064"/>
+          </a:xfrm>
+          <a:prstGeom prst="ellipse">
+            <a:avLst/>
+          </a:prstGeom>
+          <a:solidFill>
+            <a:srgbClr val="C6CBDA">
+              <a:alpha val="72000"/>
+            </a:srgbClr>
+          </a:solidFill>
+          <a:ln w="12700">
+            <a:solidFill>
+              <a:srgbClr val="C6CBDA">
+                <a:alpha val="0"/>
+              </a:srgbClr>
+            </a:solidFill>
+            <a:prstDash val="solid"/>
+          </a:ln>
+        </p:spPr>
+      </p:sp>
+      <p:sp>
+        <p:nvSpPr>
+          <p:cNvPr id="10" name="Shape 8"/>
+          <p:cNvSpPr/>
+          <p:nvPr/>
+        </p:nvSpPr>
+        <p:spPr>
+          <a:xfrm>
+            <a:off x="4237330" y="2992283"/>
+            <a:ext cx="512064" cy="512064"/>
+          </a:xfrm>
+          <a:prstGeom prst="ellipse">
+            <a:avLst/>
+          </a:prstGeom>
+          <a:solidFill>
+            <a:srgbClr val="C6CBDA">
+              <a:alpha val="72000"/>
+            </a:srgbClr>
+          </a:solidFill>
+          <a:ln w="12700">
+            <a:solidFill>
+              <a:srgbClr val="C6CBDA">
+                <a:alpha val="0"/>
+              </a:srgbClr>
+            </a:solidFill>
+            <a:prstDash val="solid"/>
+          </a:ln>
+        </p:spPr>
+      </p:sp>
+      <p:sp>
+        <p:nvSpPr>
+          <p:cNvPr id="11" name="Shape 9"/>
+          <p:cNvSpPr/>
+          <p:nvPr/>
+        </p:nvSpPr>
+        <p:spPr>
+          <a:xfrm>
+            <a:off x="4237330" y="3258556"/>
+            <a:ext cx="512064" cy="512064"/>
+          </a:xfrm>
+          <a:prstGeom prst="ellipse">
+            <a:avLst/>
+          </a:prstGeom>
+          <a:solidFill>
+            <a:srgbClr val="C6CBDA">
+              <a:alpha val="72000"/>
+            </a:srgbClr>
+          </a:solidFill>
+          <a:ln w="12700">
+            <a:solidFill>
+              <a:srgbClr val="C6CBDA">
+                <a:alpha val="0"/>
+              </a:srgbClr>
+            </a:solidFill>
+            <a:prstDash val="solid"/>
+          </a:ln>
+        </p:spPr>
+      </p:sp>
+      <p:sp>
+        <p:nvSpPr>
+          <p:cNvPr id="12" name="Shape 10"/>
+          <p:cNvSpPr/>
+          <p:nvPr/>
+        </p:nvSpPr>
+        <p:spPr>
+          <a:xfrm>
+            <a:off x="4237330" y="3524829"/>
+            <a:ext cx="512064" cy="512064"/>
+          </a:xfrm>
+          <a:prstGeom prst="ellipse">
+            <a:avLst/>
+          </a:prstGeom>
+          <a:solidFill>
+            <a:srgbClr val="C6CBDA">
+              <a:alpha val="72000"/>
+            </a:srgbClr>
+          </a:solidFill>
+          <a:ln w="12700">
+            <a:solidFill>
+              <a:srgbClr val="C6CBDA">
+                <a:alpha val="0"/>
+              </a:srgbClr>
+            </a:solidFill>
+            <a:prstDash val="solid"/>
+          </a:ln>
+        </p:spPr>
+      </p:sp>
+      <p:sp>
+        <p:nvSpPr>
+          <p:cNvPr id="13" name="Text 11"/>
+          <p:cNvSpPr txBox="1"/>
+          <p:nvPr/>
+        </p:nvSpPr>
+        <p:spPr>
+          <a:xfrm>
+            <a:off x="3949294" y="3893058"/>
+            <a:ext cx="1088136" cy="329184"/>
+          </a:xfrm>
+          <a:prstGeom prst="rect">
+            <a:avLst/>
+          </a:prstGeom>
+          <a:noFill/>
+          <a:ln/>
+        </p:spPr>
+        <p:txBody>
+          <a:bodyPr wrap="square" lIns="0" tIns="0" rIns="0" bIns="0" rtlCol="0" anchor="ctr">
+            <a:normAutofit/>
+          </a:bodyPr>
+          <a:lstStyle/>
+          <a:p>
+            <a:pPr algn="ctr" indent="0" marL="0">
+              <a:lnSpc>
+                <a:spcPct val="120000"/>
+              </a:lnSpc>
+              <a:buNone/>
+            </a:pPr>
+            <a:r>
+              <a:rPr lang="en-US" sz="1500" b="1" dirty="0">
+                <a:solidFill>
+                  <a:srgbClr val="1F2937"/>
+                </a:solidFill>
+                <a:latin typeface="Pretendard" pitchFamily="34" charset="0"/>
+                <a:ea typeface="Pretendard" pitchFamily="34" charset="-122"/>
+                <a:cs typeface="Pretendard" pitchFamily="34" charset="-120"/>
+              </a:rPr>
+              <a:t>Draft</a:t>
+            </a:r>
+            <a:endParaRPr lang="en-US" sz="1500" dirty="0"/>
+          </a:p>
+        </p:txBody>
+      </p:sp>
+      <p:sp>
+        <p:nvSpPr>
+          <p:cNvPr id="14" name="Text 12"/>
+          <p:cNvSpPr txBox="1"/>
+          <p:nvPr/>
+        </p:nvSpPr>
+        <p:spPr>
+          <a:xfrm>
+            <a:off x="3949294" y="4327398"/>
+            <a:ext cx="1088136" cy="329184"/>
+          </a:xfrm>
+          <a:prstGeom prst="rect">
+            <a:avLst/>
+          </a:prstGeom>
+          <a:noFill/>
+          <a:ln/>
+        </p:spPr>
+        <p:txBody>
+          <a:bodyPr wrap="square" lIns="0" tIns="0" rIns="0" bIns="0" rtlCol="0" anchor="ctr">
+            <a:normAutofit/>
+          </a:bodyPr>
+          <a:lstStyle/>
+          <a:p>
+            <a:pPr algn="ctr" indent="0" marL="0">
+              <a:lnSpc>
+                <a:spcPct val="120000"/>
+              </a:lnSpc>
+              <a:buNone/>
+            </a:pPr>
+            <a:r>
+              <a:rPr lang="en-US" sz="1800" b="1" dirty="0">
+                <a:solidFill>
+                  <a:srgbClr val="2563EB"/>
+                </a:solidFill>
+                <a:latin typeface="Pretendard" pitchFamily="34" charset="0"/>
+                <a:ea typeface="Pretendard" pitchFamily="34" charset="-122"/>
+                <a:cs typeface="Pretendard" pitchFamily="34" charset="-120"/>
+              </a:rPr>
+              <a:t>20%</a:t>
+            </a:r>
+            <a:endParaRPr lang="en-US" sz="1800" dirty="0"/>
+          </a:p>
+        </p:txBody>
+      </p:sp>
+      <p:sp>
+        <p:nvSpPr>
+          <p:cNvPr id="15" name="Shape 13"/>
+          <p:cNvSpPr/>
+          <p:nvPr/>
+        </p:nvSpPr>
+        <p:spPr>
+          <a:xfrm>
+            <a:off x="5417820" y="2350008"/>
+            <a:ext cx="1234440" cy="2519172"/>
+          </a:xfrm>
+          <a:prstGeom prst="roundRect">
+            <a:avLst>
+              <a:gd name="adj" fmla="val 4444"/>
+            </a:avLst>
+          </a:prstGeom>
+          <a:solidFill>
+            <a:srgbClr val="FBFBFB"/>
+          </a:solidFill>
+          <a:ln w="12700">
+            <a:solidFill>
+              <a:srgbClr val="C6CBDA"/>
+            </a:solidFill>
+            <a:prstDash val="solid"/>
+          </a:ln>
+        </p:spPr>
+      </p:sp>
+      <p:sp>
+        <p:nvSpPr>
+          <p:cNvPr id="16" name="Shape 14"/>
+          <p:cNvSpPr/>
+          <p:nvPr/>
+        </p:nvSpPr>
+        <p:spPr>
+          <a:xfrm>
+            <a:off x="5779008" y="2459736"/>
+            <a:ext cx="512064" cy="512064"/>
+          </a:xfrm>
+          <a:prstGeom prst="ellipse">
+            <a:avLst/>
+          </a:prstGeom>
+          <a:solidFill>
+            <a:srgbClr val="F03A11"/>
+          </a:solidFill>
+          <a:ln w="12700">
+            <a:solidFill>
+              <a:srgbClr val="F03A11">
+                <a:alpha val="0"/>
+              </a:srgbClr>
+            </a:solidFill>
+            <a:prstDash val="solid"/>
+          </a:ln>
+        </p:spPr>
+      </p:sp>
+      <p:sp>
+        <p:nvSpPr>
+          <p:cNvPr id="17" name="Shape 15"/>
+          <p:cNvSpPr/>
+          <p:nvPr/>
+        </p:nvSpPr>
+        <p:spPr>
+          <a:xfrm>
+            <a:off x="5779008" y="2726009"/>
+            <a:ext cx="512064" cy="512064"/>
+          </a:xfrm>
+          <a:prstGeom prst="ellipse">
+            <a:avLst/>
+          </a:prstGeom>
+          <a:solidFill>
+            <a:srgbClr val="F03A11"/>
+          </a:solidFill>
+          <a:ln w="12700">
+            <a:solidFill>
+              <a:srgbClr val="F03A11">
+                <a:alpha val="0"/>
+              </a:srgbClr>
+            </a:solidFill>
+            <a:prstDash val="solid"/>
+          </a:ln>
+        </p:spPr>
+      </p:sp>
+      <p:sp>
+        <p:nvSpPr>
+          <p:cNvPr id="18" name="Shape 16"/>
+          <p:cNvSpPr/>
+          <p:nvPr/>
+        </p:nvSpPr>
+        <p:spPr>
+          <a:xfrm>
+            <a:off x="5779008" y="2992283"/>
+            <a:ext cx="512064" cy="512064"/>
+          </a:xfrm>
+          <a:prstGeom prst="ellipse">
+            <a:avLst/>
+          </a:prstGeom>
+          <a:solidFill>
+            <a:srgbClr val="F03A11"/>
+          </a:solidFill>
+          <a:ln w="12700">
+            <a:solidFill>
+              <a:srgbClr val="F03A11">
+                <a:alpha val="0"/>
+              </a:srgbClr>
+            </a:solidFill>
+            <a:prstDash val="solid"/>
+          </a:ln>
+        </p:spPr>
+      </p:sp>
+      <p:sp>
+        <p:nvSpPr>
+          <p:cNvPr id="19" name="Shape 17"/>
+          <p:cNvSpPr/>
+          <p:nvPr/>
+        </p:nvSpPr>
+        <p:spPr>
+          <a:xfrm>
+            <a:off x="5779008" y="3258556"/>
+            <a:ext cx="512064" cy="512064"/>
+          </a:xfrm>
+          <a:prstGeom prst="ellipse">
+            <a:avLst/>
+          </a:prstGeom>
+          <a:solidFill>
+            <a:srgbClr val="C6CBDA">
+              <a:alpha val="72000"/>
+            </a:srgbClr>
+          </a:solidFill>
+          <a:ln w="12700">
+            <a:solidFill>
+              <a:srgbClr val="C6CBDA">
+                <a:alpha val="0"/>
+              </a:srgbClr>
+            </a:solidFill>
+            <a:prstDash val="solid"/>
+          </a:ln>
+        </p:spPr>
+      </p:sp>
+      <p:sp>
+        <p:nvSpPr>
+          <p:cNvPr id="20" name="Shape 18"/>
+          <p:cNvSpPr/>
+          <p:nvPr/>
+        </p:nvSpPr>
+        <p:spPr>
+          <a:xfrm>
+            <a:off x="5779008" y="3524829"/>
+            <a:ext cx="512064" cy="512064"/>
+          </a:xfrm>
+          <a:prstGeom prst="ellipse">
+            <a:avLst/>
+          </a:prstGeom>
+          <a:solidFill>
+            <a:srgbClr val="C6CBDA">
+              <a:alpha val="72000"/>
+            </a:srgbClr>
+          </a:solidFill>
+          <a:ln w="12700">
+            <a:solidFill>
+              <a:srgbClr val="C6CBDA">
+                <a:alpha val="0"/>
+              </a:srgbClr>
+            </a:solidFill>
+            <a:prstDash val="solid"/>
+          </a:ln>
+        </p:spPr>
+      </p:sp>
+      <p:sp>
+        <p:nvSpPr>
+          <p:cNvPr id="21" name="Text 19"/>
+          <p:cNvSpPr txBox="1"/>
+          <p:nvPr/>
+        </p:nvSpPr>
+        <p:spPr>
+          <a:xfrm>
+            <a:off x="5490972" y="3893058"/>
+            <a:ext cx="1088136" cy="329184"/>
+          </a:xfrm>
+          <a:prstGeom prst="rect">
+            <a:avLst/>
+          </a:prstGeom>
+          <a:noFill/>
+          <a:ln/>
+        </p:spPr>
+        <p:txBody>
+          <a:bodyPr wrap="square" lIns="0" tIns="0" rIns="0" bIns="0" rtlCol="0" anchor="ctr">
+            <a:normAutofit/>
+          </a:bodyPr>
+          <a:lstStyle/>
+          <a:p>
+            <a:pPr algn="ctr" indent="0" marL="0">
+              <a:lnSpc>
+                <a:spcPct val="120000"/>
+              </a:lnSpc>
+              <a:buNone/>
+            </a:pPr>
+            <a:r>
+              <a:rPr lang="en-US" sz="1500" b="1" dirty="0">
+                <a:solidFill>
+                  <a:srgbClr val="1F2937"/>
+                </a:solidFill>
+                <a:latin typeface="Pretendard" pitchFamily="34" charset="0"/>
+                <a:ea typeface="Pretendard" pitchFamily="34" charset="-122"/>
+                <a:cs typeface="Pretendard" pitchFamily="34" charset="-120"/>
+              </a:rPr>
+              <a:t>Review</a:t>
+            </a:r>
+            <a:endParaRPr lang="en-US" sz="1500" dirty="0"/>
+          </a:p>
+        </p:txBody>
+      </p:sp>
+      <p:sp>
+        <p:nvSpPr>
+          <p:cNvPr id="22" name="Text 20"/>
+          <p:cNvSpPr txBox="1"/>
+          <p:nvPr/>
+        </p:nvSpPr>
+        <p:spPr>
+          <a:xfrm>
+            <a:off x="5490972" y="4327398"/>
+            <a:ext cx="1088136" cy="329184"/>
+          </a:xfrm>
+          <a:prstGeom prst="rect">
+            <a:avLst/>
+          </a:prstGeom>
+          <a:noFill/>
+          <a:ln/>
+        </p:spPr>
+        <p:txBody>
+          <a:bodyPr wrap="square" lIns="0" tIns="0" rIns="0" bIns="0" rtlCol="0" anchor="ctr">
+            <a:normAutofit/>
+          </a:bodyPr>
+          <a:lstStyle/>
+          <a:p>
+            <a:pPr algn="ctr" indent="0" marL="0">
+              <a:lnSpc>
+                <a:spcPct val="120000"/>
+              </a:lnSpc>
+              <a:buNone/>
+            </a:pPr>
+            <a:r>
+              <a:rPr lang="en-US" sz="1800" b="1" dirty="0">
+                <a:solidFill>
+                  <a:srgbClr val="F03A11"/>
+                </a:solidFill>
+                <a:latin typeface="Pretendard" pitchFamily="34" charset="0"/>
+                <a:ea typeface="Pretendard" pitchFamily="34" charset="-122"/>
+                <a:cs typeface="Pretendard" pitchFamily="34" charset="-120"/>
+              </a:rPr>
+              <a:t>68%</a:t>
+            </a:r>
+            <a:endParaRPr lang="en-US" sz="1800" dirty="0"/>
+          </a:p>
+        </p:txBody>
+      </p:sp>
+      <p:sp>
+        <p:nvSpPr>
+          <p:cNvPr id="23" name="Shape 21"/>
+          <p:cNvSpPr/>
+          <p:nvPr/>
+        </p:nvSpPr>
+        <p:spPr>
+          <a:xfrm>
+            <a:off x="6959498" y="2350008"/>
+            <a:ext cx="1234440" cy="2519172"/>
+          </a:xfrm>
+          <a:prstGeom prst="roundRect">
+            <a:avLst>
+              <a:gd name="adj" fmla="val 4444"/>
+            </a:avLst>
+          </a:prstGeom>
+          <a:solidFill>
+            <a:srgbClr val="FBFBFB"/>
+          </a:solidFill>
+          <a:ln w="12700">
+            <a:solidFill>
+              <a:srgbClr val="C6CBDA"/>
+            </a:solidFill>
+            <a:prstDash val="solid"/>
+          </a:ln>
+        </p:spPr>
+      </p:sp>
+      <p:sp>
+        <p:nvSpPr>
+          <p:cNvPr id="24" name="Shape 22"/>
+          <p:cNvSpPr/>
+          <p:nvPr/>
+        </p:nvSpPr>
+        <p:spPr>
+          <a:xfrm>
+            <a:off x="7320686" y="2459736"/>
+            <a:ext cx="512064" cy="512064"/>
+          </a:xfrm>
+          <a:prstGeom prst="ellipse">
+            <a:avLst/>
+          </a:prstGeom>
+          <a:solidFill>
+            <a:srgbClr val="C7F015"/>
+          </a:solidFill>
+          <a:ln w="12700">
+            <a:solidFill>
+              <a:srgbClr val="C7F015">
+                <a:alpha val="0"/>
+              </a:srgbClr>
+            </a:solidFill>
+            <a:prstDash val="solid"/>
+          </a:ln>
+        </p:spPr>
+      </p:sp>
+      <p:sp>
+        <p:nvSpPr>
+          <p:cNvPr id="25" name="Shape 23"/>
+          <p:cNvSpPr/>
+          <p:nvPr/>
+        </p:nvSpPr>
+        <p:spPr>
+          <a:xfrm>
+            <a:off x="7320686" y="2726009"/>
+            <a:ext cx="512064" cy="512064"/>
+          </a:xfrm>
+          <a:prstGeom prst="ellipse">
+            <a:avLst/>
+          </a:prstGeom>
+          <a:solidFill>
+            <a:srgbClr val="C7F015"/>
+          </a:solidFill>
+          <a:ln w="12700">
+            <a:solidFill>
+              <a:srgbClr val="C7F015">
+                <a:alpha val="0"/>
+              </a:srgbClr>
+            </a:solidFill>
+            <a:prstDash val="solid"/>
+          </a:ln>
+        </p:spPr>
+      </p:sp>
+      <p:sp>
+        <p:nvSpPr>
+          <p:cNvPr id="26" name="Shape 24"/>
+          <p:cNvSpPr/>
+          <p:nvPr/>
+        </p:nvSpPr>
+        <p:spPr>
+          <a:xfrm>
+            <a:off x="7320686" y="2992283"/>
+            <a:ext cx="512064" cy="512064"/>
+          </a:xfrm>
+          <a:prstGeom prst="ellipse">
+            <a:avLst/>
+          </a:prstGeom>
+          <a:solidFill>
+            <a:srgbClr val="C7F015"/>
+          </a:solidFill>
+          <a:ln w="12700">
+            <a:solidFill>
+              <a:srgbClr val="C7F015">
+                <a:alpha val="0"/>
+              </a:srgbClr>
+            </a:solidFill>
+            <a:prstDash val="solid"/>
+          </a:ln>
+        </p:spPr>
+      </p:sp>
+      <p:sp>
+        <p:nvSpPr>
+          <p:cNvPr id="27" name="Shape 25"/>
+          <p:cNvSpPr/>
+          <p:nvPr/>
+        </p:nvSpPr>
+        <p:spPr>
+          <a:xfrm>
+            <a:off x="7320686" y="3258556"/>
+            <a:ext cx="512064" cy="512064"/>
+          </a:xfrm>
+          <a:prstGeom prst="ellipse">
+            <a:avLst/>
+          </a:prstGeom>
+          <a:solidFill>
+            <a:srgbClr val="C7F015"/>
+          </a:solidFill>
+          <a:ln w="12700">
+            <a:solidFill>
+              <a:srgbClr val="C7F015">
+                <a:alpha val="0"/>
+              </a:srgbClr>
+            </a:solidFill>
+            <a:prstDash val="solid"/>
+          </a:ln>
+        </p:spPr>
+      </p:sp>
+      <p:sp>
+        <p:nvSpPr>
+          <p:cNvPr id="28" name="Shape 26"/>
+          <p:cNvSpPr/>
+          <p:nvPr/>
+        </p:nvSpPr>
+        <p:spPr>
+          <a:xfrm>
+            <a:off x="7320686" y="3524829"/>
+            <a:ext cx="512064" cy="512064"/>
+          </a:xfrm>
+          <a:prstGeom prst="ellipse">
+            <a:avLst/>
+          </a:prstGeom>
+          <a:solidFill>
+            <a:srgbClr val="C7F015"/>
+          </a:solidFill>
+          <a:ln w="12700">
+            <a:solidFill>
+              <a:srgbClr val="C7F015">
+                <a:alpha val="0"/>
+              </a:srgbClr>
+            </a:solidFill>
+            <a:prstDash val="solid"/>
+          </a:ln>
+        </p:spPr>
+      </p:sp>
+      <p:sp>
+        <p:nvSpPr>
+          <p:cNvPr id="29" name="Text 27"/>
+          <p:cNvSpPr txBox="1"/>
+          <p:nvPr/>
+        </p:nvSpPr>
+        <p:spPr>
+          <a:xfrm>
+            <a:off x="7032650" y="3893058"/>
+            <a:ext cx="1088136" cy="329184"/>
+          </a:xfrm>
+          <a:prstGeom prst="rect">
+            <a:avLst/>
+          </a:prstGeom>
+          <a:noFill/>
+          <a:ln/>
+        </p:spPr>
+        <p:txBody>
+          <a:bodyPr wrap="square" lIns="0" tIns="0" rIns="0" bIns="0" rtlCol="0" anchor="ctr">
+            <a:normAutofit/>
+          </a:bodyPr>
+          <a:lstStyle/>
+          <a:p>
+            <a:pPr algn="ctr" indent="0" marL="0">
+              <a:lnSpc>
+                <a:spcPct val="120000"/>
+              </a:lnSpc>
+              <a:buNone/>
+            </a:pPr>
+            <a:r>
+              <a:rPr lang="en-US" sz="1500" b="1" dirty="0">
+                <a:solidFill>
+                  <a:srgbClr val="1F2937"/>
+                </a:solidFill>
+                <a:latin typeface="Pretendard" pitchFamily="34" charset="0"/>
+                <a:ea typeface="Pretendard" pitchFamily="34" charset="-122"/>
+                <a:cs typeface="Pretendard" pitchFamily="34" charset="-120"/>
+              </a:rPr>
+              <a:t>Ship</a:t>
+            </a:r>
+            <a:endParaRPr lang="en-US" sz="1500" dirty="0"/>
+          </a:p>
+        </p:txBody>
+      </p:sp>
+      <p:sp>
+        <p:nvSpPr>
+          <p:cNvPr id="30" name="Text 28"/>
+          <p:cNvSpPr txBox="1"/>
+          <p:nvPr/>
+        </p:nvSpPr>
+        <p:spPr>
+          <a:xfrm>
+            <a:off x="7032650" y="4327398"/>
+            <a:ext cx="1088136" cy="329184"/>
+          </a:xfrm>
+          <a:prstGeom prst="rect">
+            <a:avLst/>
+          </a:prstGeom>
+          <a:noFill/>
+          <a:ln/>
+        </p:spPr>
+        <p:txBody>
+          <a:bodyPr wrap="square" lIns="0" tIns="0" rIns="0" bIns="0" rtlCol="0" anchor="ctr">
+            <a:normAutofit/>
+          </a:bodyPr>
+          <a:lstStyle/>
+          <a:p>
+            <a:pPr algn="ctr" indent="0" marL="0">
+              <a:lnSpc>
+                <a:spcPct val="120000"/>
+              </a:lnSpc>
+              <a:buNone/>
+            </a:pPr>
+            <a:r>
+              <a:rPr lang="en-US" sz="1800" b="1" dirty="0">
+                <a:solidFill>
+                  <a:srgbClr val="C7F015"/>
+                </a:solidFill>
+                <a:latin typeface="Pretendard" pitchFamily="34" charset="0"/>
+                <a:ea typeface="Pretendard" pitchFamily="34" charset="-122"/>
+                <a:cs typeface="Pretendard" pitchFamily="34" charset="-120"/>
+              </a:rPr>
+              <a:t>92%</a:t>
+            </a:r>
+            <a:endParaRPr lang="en-US" sz="1800" dirty="0"/>
+          </a:p>
+        </p:txBody>
+      </p:sp>
+    </p:spTree>
+  </p:cSld>
+  <p:clrMapOvr>
+    <a:masterClrMapping/>
+  </p:clrMapOvr>
+</p:sld>
+</file>
+
+<file path=ppt/slides/slide13.xml><?xml version="1.0" encoding="utf-8"?>
+<p:sld xmlns:a="http://schemas.openxmlformats.org/drawingml/2006/main" xmlns:r="http://schemas.openxmlformats.org/officeDocument/2006/relationships" xmlns:p="http://schemas.openxmlformats.org/presentationml/2006/main">
+  <p:cSld name="Slide 13">
+    <p:bg>
+      <p:bgPr>
+        <a:solidFill>
+          <a:srgbClr val="FFFFFF"/>
+        </a:solidFill>
+      </p:bgPr>
+    </p:bg>
+    <p:spTree>
+      <p:nvGrpSpPr>
+        <p:cNvPr id="1" name=""/>
+        <p:cNvGrpSpPr/>
+        <p:nvPr/>
+      </p:nvGrpSpPr>
+      <p:grpSpPr>
+        <a:xfrm>
+          <a:off x="0" y="0"/>
+          <a:ext cx="0" cy="0"/>
+          <a:chOff x="0" y="0"/>
+          <a:chExt cx="0" cy="0"/>
+        </a:xfrm>
+      </p:grpSpPr>
+      <p:sp>
+        <p:nvSpPr>
+          <p:cNvPr id="2" name="Shape 0"/>
+          <p:cNvSpPr/>
+          <p:nvPr/>
+        </p:nvSpPr>
+        <p:spPr>
+          <a:xfrm>
+            <a:off x="10134295" y="0"/>
+            <a:ext cx="2057400" cy="256032"/>
+          </a:xfrm>
+          <a:prstGeom prst="rect">
+            <a:avLst/>
+          </a:prstGeom>
+          <a:solidFill>
+            <a:srgbClr val="2563EB"/>
+          </a:solidFill>
+          <a:ln w="12700">
+            <a:solidFill>
+              <a:srgbClr val="2563EB">
+                <a:alpha val="0"/>
+              </a:srgbClr>
+            </a:solidFill>
+            <a:prstDash val="solid"/>
+          </a:ln>
+        </p:spPr>
+      </p:sp>
+      <p:sp>
+        <p:nvSpPr>
+          <p:cNvPr id="3" name="Shape 1"/>
+          <p:cNvSpPr/>
+          <p:nvPr/>
+        </p:nvSpPr>
+        <p:spPr>
+          <a:xfrm>
+            <a:off x="11048695" y="256032"/>
+            <a:ext cx="1143000" cy="73152"/>
+          </a:xfrm>
+          <a:prstGeom prst="rect">
+            <a:avLst/>
+          </a:prstGeom>
+          <a:solidFill>
+            <a:srgbClr val="F03A11"/>
+          </a:solidFill>
+          <a:ln w="12700">
+            <a:solidFill>
+              <a:srgbClr val="F03A11">
+                <a:alpha val="0"/>
+              </a:srgbClr>
+            </a:solidFill>
+            <a:prstDash val="solid"/>
+          </a:ln>
+        </p:spPr>
+      </p:sp>
+      <p:sp>
+        <p:nvSpPr>
+          <p:cNvPr id="4" name="Shape 2"/>
+          <p:cNvSpPr/>
+          <p:nvPr/>
+        </p:nvSpPr>
+        <p:spPr>
+          <a:xfrm>
+            <a:off x="731520" y="1207008"/>
+            <a:ext cx="1325880" cy="54864"/>
+          </a:xfrm>
+          <a:prstGeom prst="rect">
+            <a:avLst/>
+          </a:prstGeom>
+          <a:solidFill>
+            <a:srgbClr val="C7F015"/>
+          </a:solidFill>
+          <a:ln w="12700">
+            <a:solidFill>
+              <a:srgbClr val="C7F015">
                 <a:alpha val="0"/>
               </a:srgbClr>
             </a:solidFill>
@@ -3245,11 +5214,11 @@
             <a:avLst/>
           </a:prstGeom>
           <a:solidFill>
-            <a:srgbClr val="EB4A25"/>
-          </a:solidFill>
-          <a:ln w="12700">
-            <a:solidFill>
-              <a:srgbClr val="EB4A25">
+            <a:srgbClr val="F03A11"/>
+          </a:solidFill>
+          <a:ln w="12700">
+            <a:solidFill>
+              <a:srgbClr val="F03A11">
                 <a:alpha val="0"/>
               </a:srgbClr>
             </a:solidFill>
@@ -3450,13 +5419,11 @@
         </p:nvSpPr>
         <p:spPr>
           <a:xfrm>
-            <a:off x="1207740" y="1721084"/>
-            <a:ext cx="149230" cy="192756"/>
-          </a:xfrm>
-          <a:prstGeom prst="roundRect">
-            <a:avLst>
-              <a:gd name="adj" fmla="val 24510"/>
-            </a:avLst>
+            <a:off x="1213957" y="1820322"/>
+            <a:ext cx="44769" cy="44769"/>
+          </a:xfrm>
+          <a:prstGeom prst="ellipse">
+            <a:avLst/>
           </a:prstGeom>
           <a:solidFill>
             <a:srgbClr val="1F2937"/>
@@ -3479,18 +5446,18 @@
         </p:nvSpPr>
         <p:spPr>
           <a:xfrm>
-            <a:off x="1245047" y="1770827"/>
-            <a:ext cx="77724" cy="10881"/>
-          </a:xfrm>
-          <a:prstGeom prst="rect">
-            <a:avLst/>
-          </a:prstGeom>
-          <a:solidFill>
-            <a:srgbClr val="FFFFFF"/>
-          </a:solidFill>
-          <a:ln w="12700">
-            <a:solidFill>
-              <a:srgbClr val="FFFFFF">
+            <a:off x="1299019" y="1820322"/>
+            <a:ext cx="44769" cy="44769"/>
+          </a:xfrm>
+          <a:prstGeom prst="ellipse">
+            <a:avLst/>
+          </a:prstGeom>
+          <a:solidFill>
+            <a:srgbClr val="1F2937"/>
+          </a:solidFill>
+          <a:ln w="12700">
+            <a:solidFill>
+              <a:srgbClr val="1F2937">
                 <a:alpha val="0"/>
               </a:srgbClr>
             </a:solidFill>
@@ -3506,18 +5473,18 @@
         </p:nvSpPr>
         <p:spPr>
           <a:xfrm>
-            <a:off x="1245047" y="1811244"/>
-            <a:ext cx="77724" cy="10881"/>
-          </a:xfrm>
-          <a:prstGeom prst="rect">
-            <a:avLst/>
-          </a:prstGeom>
-          <a:solidFill>
-            <a:srgbClr val="FFFFFF"/>
-          </a:solidFill>
-          <a:ln w="12700">
-            <a:solidFill>
-              <a:srgbClr val="FFFFFF">
+            <a:off x="1384080" y="1820322"/>
+            <a:ext cx="44769" cy="44769"/>
+          </a:xfrm>
+          <a:prstGeom prst="ellipse">
+            <a:avLst/>
+          </a:prstGeom>
+          <a:solidFill>
+            <a:srgbClr val="1F2937"/>
+          </a:solidFill>
+          <a:ln w="12700">
+            <a:solidFill>
+              <a:srgbClr val="1F2937">
                 <a:alpha val="0"/>
               </a:srgbClr>
             </a:solidFill>
@@ -3533,28 +5500,55 @@
         </p:nvSpPr>
         <p:spPr>
           <a:xfrm>
-            <a:off x="1245047" y="1851660"/>
-            <a:ext cx="77724" cy="10881"/>
-          </a:xfrm>
-          <a:prstGeom prst="rect">
-            <a:avLst/>
-          </a:prstGeom>
-          <a:solidFill>
-            <a:srgbClr val="FFFFFF"/>
-          </a:solidFill>
-          <a:ln w="12700">
-            <a:solidFill>
-              <a:srgbClr val="FFFFFF">
-                <a:alpha val="0"/>
-              </a:srgbClr>
-            </a:solidFill>
-            <a:prstDash val="solid"/>
-          </a:ln>
-        </p:spPr>
-      </p:sp>
-      <p:sp>
-        <p:nvSpPr>
-          <p:cNvPr id="17" name="Text 15"/>
+            <a:off x="1258726" y="1840468"/>
+            <a:ext cx="49246" cy="10073"/>
+          </a:xfrm>
+          <a:prstGeom prst="rect">
+            <a:avLst/>
+          </a:prstGeom>
+          <a:solidFill>
+            <a:srgbClr val="1F2937"/>
+          </a:solidFill>
+          <a:ln w="12700">
+            <a:solidFill>
+              <a:srgbClr val="1F2937">
+                <a:alpha val="0"/>
+              </a:srgbClr>
+            </a:solidFill>
+            <a:prstDash val="solid"/>
+          </a:ln>
+        </p:spPr>
+      </p:sp>
+      <p:sp>
+        <p:nvSpPr>
+          <p:cNvPr id="17" name="Shape 15"/>
+          <p:cNvSpPr/>
+          <p:nvPr/>
+        </p:nvSpPr>
+        <p:spPr>
+          <a:xfrm>
+            <a:off x="1343788" y="1840468"/>
+            <a:ext cx="49246" cy="10073"/>
+          </a:xfrm>
+          <a:prstGeom prst="rect">
+            <a:avLst/>
+          </a:prstGeom>
+          <a:solidFill>
+            <a:srgbClr val="1F2937"/>
+          </a:solidFill>
+          <a:ln w="12700">
+            <a:solidFill>
+              <a:srgbClr val="1F2937">
+                <a:alpha val="0"/>
+              </a:srgbClr>
+            </a:solidFill>
+            <a:prstDash val="solid"/>
+          </a:ln>
+        </p:spPr>
+      </p:sp>
+      <p:sp>
+        <p:nvSpPr>
+          <p:cNvPr id="18" name="Text 16"/>
           <p:cNvSpPr txBox="1"/>
           <p:nvPr/>
         </p:nvSpPr>
@@ -3598,7 +5592,7 @@
       </p:sp>
       <p:sp>
         <p:nvSpPr>
-          <p:cNvPr id="18" name="Shape 16"/>
+          <p:cNvPr id="19" name="Shape 17"/>
           <p:cNvSpPr/>
           <p:nvPr/>
         </p:nvSpPr>
@@ -3625,16 +5619,16 @@
       </p:sp>
       <p:sp>
         <p:nvSpPr>
-          <p:cNvPr id="19" name="Shape 17"/>
-          <p:cNvSpPr/>
-          <p:nvPr/>
-        </p:nvSpPr>
-        <p:spPr>
-          <a:xfrm>
-            <a:off x="1207740" y="2951135"/>
-            <a:ext cx="55961" cy="55961"/>
-          </a:xfrm>
-          <a:prstGeom prst="ellipse">
+          <p:cNvPr id="20" name="Shape 18"/>
+          <p:cNvSpPr/>
+          <p:nvPr/>
+        </p:nvSpPr>
+        <p:spPr>
+          <a:xfrm rot="10800000">
+            <a:off x="1240819" y="2896168"/>
+            <a:ext cx="170122" cy="188030"/>
+          </a:xfrm>
+          <a:prstGeom prst="pentagon">
             <a:avLst/>
           </a:prstGeom>
           <a:solidFill>
@@ -3652,115 +5646,34 @@
       </p:sp>
       <p:sp>
         <p:nvSpPr>
-          <p:cNvPr id="20" name="Shape 18"/>
-          <p:cNvSpPr/>
-          <p:nvPr/>
-        </p:nvSpPr>
-        <p:spPr>
-          <a:xfrm>
-            <a:off x="1325880" y="2951135"/>
-            <a:ext cx="55961" cy="55961"/>
-          </a:xfrm>
-          <a:prstGeom prst="ellipse">
-            <a:avLst/>
-          </a:prstGeom>
-          <a:solidFill>
-            <a:srgbClr val="1F2937"/>
-          </a:solidFill>
-          <a:ln w="12700">
-            <a:solidFill>
-              <a:srgbClr val="1F2937">
-                <a:alpha val="0"/>
-              </a:srgbClr>
-            </a:solidFill>
-            <a:prstDash val="solid"/>
-          </a:ln>
-        </p:spPr>
-      </p:sp>
-      <p:sp>
-        <p:nvSpPr>
           <p:cNvPr id="21" name="Shape 19"/>
           <p:cNvSpPr/>
           <p:nvPr/>
         </p:nvSpPr>
         <p:spPr>
-          <a:xfrm>
-            <a:off x="1444020" y="2951135"/>
-            <a:ext cx="55961" cy="55961"/>
-          </a:xfrm>
-          <a:prstGeom prst="ellipse">
-            <a:avLst/>
-          </a:prstGeom>
-          <a:solidFill>
-            <a:srgbClr val="1F2937"/>
-          </a:solidFill>
-          <a:ln w="12700">
-            <a:solidFill>
-              <a:srgbClr val="1F2937">
-                <a:alpha val="0"/>
-              </a:srgbClr>
-            </a:solidFill>
-            <a:prstDash val="solid"/>
-          </a:ln>
-        </p:spPr>
-      </p:sp>
-      <p:sp>
-        <p:nvSpPr>
-          <p:cNvPr id="22" name="Shape 20"/>
-          <p:cNvSpPr/>
-          <p:nvPr/>
-        </p:nvSpPr>
-        <p:spPr>
-          <a:xfrm>
-            <a:off x="1260592" y="2976006"/>
-            <a:ext cx="68397" cy="10881"/>
-          </a:xfrm>
-          <a:prstGeom prst="rect">
-            <a:avLst/>
-          </a:prstGeom>
-          <a:solidFill>
-            <a:srgbClr val="1F2937"/>
-          </a:solidFill>
-          <a:ln w="12700">
-            <a:solidFill>
-              <a:srgbClr val="1F2937">
-                <a:alpha val="0"/>
-              </a:srgbClr>
-            </a:solidFill>
-            <a:prstDash val="solid"/>
-          </a:ln>
-        </p:spPr>
-      </p:sp>
-      <p:sp>
-        <p:nvSpPr>
-          <p:cNvPr id="23" name="Shape 21"/>
-          <p:cNvSpPr/>
-          <p:nvPr/>
-        </p:nvSpPr>
-        <p:spPr>
-          <a:xfrm>
-            <a:off x="1378732" y="2976006"/>
-            <a:ext cx="68397" cy="10881"/>
-          </a:xfrm>
-          <a:prstGeom prst="rect">
-            <a:avLst/>
-          </a:prstGeom>
-          <a:solidFill>
-            <a:srgbClr val="1F2937"/>
-          </a:solidFill>
-          <a:ln w="12700">
-            <a:solidFill>
-              <a:srgbClr val="1F2937">
-                <a:alpha val="0"/>
-              </a:srgbClr>
-            </a:solidFill>
-            <a:prstDash val="solid"/>
-          </a:ln>
-        </p:spPr>
-      </p:sp>
-      <p:sp>
-        <p:nvSpPr>
-          <p:cNvPr id="24" name="Text 22"/>
+          <a:xfrm rot="2100000">
+            <a:off x="1314688" y="2945414"/>
+            <a:ext cx="24623" cy="85061"/>
+          </a:xfrm>
+          <a:prstGeom prst="rect">
+            <a:avLst/>
+          </a:prstGeom>
+          <a:solidFill>
+            <a:srgbClr val="FFFFFF"/>
+          </a:solidFill>
+          <a:ln w="12700">
+            <a:solidFill>
+              <a:srgbClr val="FFFFFF">
+                <a:alpha val="0"/>
+              </a:srgbClr>
+            </a:solidFill>
+            <a:prstDash val="solid"/>
+          </a:ln>
+        </p:spPr>
+      </p:sp>
+      <p:sp>
+        <p:nvSpPr>
+          <p:cNvPr id="22" name="Text 20"/>
           <p:cNvSpPr txBox="1"/>
           <p:nvPr/>
         </p:nvSpPr>
@@ -3804,7 +5717,7 @@
       </p:sp>
       <p:sp>
         <p:nvSpPr>
-          <p:cNvPr id="25" name="Shape 23"/>
+          <p:cNvPr id="23" name="Shape 21"/>
           <p:cNvSpPr/>
           <p:nvPr/>
         </p:nvSpPr>
@@ -3831,16 +5744,70 @@
       </p:sp>
       <p:sp>
         <p:nvSpPr>
+          <p:cNvPr id="24" name="Shape 22"/>
+          <p:cNvSpPr/>
+          <p:nvPr/>
+        </p:nvSpPr>
+        <p:spPr>
+          <a:xfrm>
+            <a:off x="1276634" y="4025737"/>
+            <a:ext cx="71630" cy="71630"/>
+          </a:xfrm>
+          <a:prstGeom prst="diamond">
+            <a:avLst/>
+          </a:prstGeom>
+          <a:solidFill>
+            <a:srgbClr val="1F2937"/>
+          </a:solidFill>
+          <a:ln w="12700">
+            <a:solidFill>
+              <a:srgbClr val="1F2937">
+                <a:alpha val="0"/>
+              </a:srgbClr>
+            </a:solidFill>
+            <a:prstDash val="solid"/>
+          </a:ln>
+        </p:spPr>
+      </p:sp>
+      <p:sp>
+        <p:nvSpPr>
+          <p:cNvPr id="25" name="Shape 23"/>
+          <p:cNvSpPr/>
+          <p:nvPr/>
+        </p:nvSpPr>
+        <p:spPr>
+          <a:xfrm>
+            <a:off x="1225150" y="4126468"/>
+            <a:ext cx="44769" cy="44769"/>
+          </a:xfrm>
+          <a:prstGeom prst="diamond">
+            <a:avLst/>
+          </a:prstGeom>
+          <a:solidFill>
+            <a:srgbClr val="1F2937"/>
+          </a:solidFill>
+          <a:ln w="12700">
+            <a:solidFill>
+              <a:srgbClr val="1F2937">
+                <a:alpha val="0"/>
+              </a:srgbClr>
+            </a:solidFill>
+            <a:prstDash val="solid"/>
+          </a:ln>
+        </p:spPr>
+      </p:sp>
+      <p:sp>
+        <p:nvSpPr>
           <p:cNvPr id="26" name="Shape 24"/>
           <p:cNvSpPr/>
           <p:nvPr/>
         </p:nvSpPr>
         <p:spPr>
-          <a:xfrm rot="10800000">
-            <a:off x="1207740" y="4007084"/>
-            <a:ext cx="170993" cy="202082"/>
-          </a:xfrm>
-          <a:prstGeom prst="pentagon">
+          <a:xfrm>
+            <a:off x="1352741" y="4148852"/>
+            <a:ext cx="49246" cy="49246"/>
+          </a:xfrm>
+          <a:prstGeom prst="diamond">
             <a:avLst/>
           </a:prstGeom>
           <a:solidFill>
@@ -3858,34 +5825,7 @@
       </p:sp>
       <p:sp>
         <p:nvSpPr>
-          <p:cNvPr id="27" name="Shape 25"/>
-          <p:cNvSpPr/>
-          <p:nvPr/>
-        </p:nvSpPr>
-        <p:spPr>
-          <a:xfrm>
-            <a:off x="1276137" y="4044391"/>
-            <a:ext cx="31090" cy="87051"/>
-          </a:xfrm>
-          <a:prstGeom prst="rect">
-            <a:avLst/>
-          </a:prstGeom>
-          <a:solidFill>
-            <a:srgbClr val="FFFFFF"/>
-          </a:solidFill>
-          <a:ln w="12700">
-            <a:solidFill>
-              <a:srgbClr val="FFFFFF">
-                <a:alpha val="0"/>
-              </a:srgbClr>
-            </a:solidFill>
-            <a:prstDash val="solid"/>
-          </a:ln>
-        </p:spPr>
-      </p:sp>
-      <p:sp>
-        <p:nvSpPr>
-          <p:cNvPr id="28" name="Text 26"/>
+          <p:cNvPr id="27" name="Text 25"/>
           <p:cNvSpPr txBox="1"/>
           <p:nvPr/>
         </p:nvSpPr>
@@ -4001,11 +5941,11 @@
             <a:avLst/>
           </a:prstGeom>
           <a:solidFill>
-            <a:srgbClr val="EB4A25"/>
-          </a:solidFill>
-          <a:ln w="12700">
-            <a:solidFill>
-              <a:srgbClr val="EB4A25">
+            <a:srgbClr val="F03A11"/>
+          </a:solidFill>
+          <a:ln w="12700">
+            <a:solidFill>
+              <a:srgbClr val="F03A11">
                 <a:alpha val="0"/>
               </a:srgbClr>
             </a:solidFill>
@@ -4028,11 +5968,11 @@
             <a:avLst/>
           </a:prstGeom>
           <a:solidFill>
-            <a:srgbClr val="C6EB25"/>
-          </a:solidFill>
-          <a:ln w="12700">
-            <a:solidFill>
-              <a:srgbClr val="C6EB25">
+            <a:srgbClr val="C7F015"/>
+          </a:solidFill>
+          <a:ln w="12700">
+            <a:solidFill>
+              <a:srgbClr val="C7F015">
                 <a:alpha val="0"/>
               </a:srgbClr>
             </a:solidFill>
@@ -4119,7 +6059,7 @@
         </p:nvSpPr>
         <p:spPr>
           <a:xfrm>
-            <a:off x="987552" y="2069592"/>
+            <a:off x="987552" y="1661160"/>
             <a:ext cx="10094976" cy="408432"/>
           </a:xfrm>
           <a:prstGeom prst="rect">
@@ -4163,7 +6103,7 @@
         </p:nvSpPr>
         <p:spPr>
           <a:xfrm>
-            <a:off x="987552" y="2478024"/>
+            <a:off x="987552" y="2069592"/>
             <a:ext cx="10094976" cy="408432"/>
           </a:xfrm>
           <a:prstGeom prst="rect">
@@ -4207,7 +6147,7 @@
         </p:nvSpPr>
         <p:spPr>
           <a:xfrm>
-            <a:off x="987552" y="2886456"/>
+            <a:off x="987552" y="2478024"/>
             <a:ext cx="10094976" cy="408432"/>
           </a:xfrm>
           <a:prstGeom prst="rect">
@@ -4251,7 +6191,7 @@
         </p:nvSpPr>
         <p:spPr>
           <a:xfrm>
-            <a:off x="987552" y="3294888"/>
+            <a:off x="987552" y="2886456"/>
             <a:ext cx="10094976" cy="408432"/>
           </a:xfrm>
           <a:prstGeom prst="rect">
@@ -4295,7 +6235,7 @@
         </p:nvSpPr>
         <p:spPr>
           <a:xfrm>
-            <a:off x="987552" y="3703320"/>
+            <a:off x="987552" y="3294888"/>
             <a:ext cx="10094976" cy="408432"/>
           </a:xfrm>
           <a:prstGeom prst="rect">
@@ -4339,7 +6279,7 @@
         </p:nvSpPr>
         <p:spPr>
           <a:xfrm>
-            <a:off x="987552" y="4111752"/>
+            <a:off x="987552" y="3703320"/>
             <a:ext cx="10094976" cy="408432"/>
           </a:xfrm>
           <a:prstGeom prst="rect">
@@ -4383,7 +6323,7 @@
         </p:nvSpPr>
         <p:spPr>
           <a:xfrm>
-            <a:off x="987552" y="4520184"/>
+            <a:off x="987552" y="4111752"/>
             <a:ext cx="10094976" cy="408432"/>
           </a:xfrm>
           <a:prstGeom prst="rect">
@@ -4427,7 +6367,95 @@
         </p:nvSpPr>
         <p:spPr>
           <a:xfrm>
+            <a:off x="987552" y="4520184"/>
+            <a:ext cx="10094976" cy="408432"/>
+          </a:xfrm>
+          <a:prstGeom prst="rect">
+            <a:avLst/>
+          </a:prstGeom>
+          <a:noFill/>
+          <a:ln/>
+        </p:spPr>
+        <p:txBody>
+          <a:bodyPr wrap="square" lIns="0" tIns="25400" rIns="25400" bIns="0" rtlCol="0" anchor="ctr">
+            <a:normAutofit/>
+          </a:bodyPr>
+          <a:lstStyle/>
+          <a:p>
+            <a:pPr algn="l" indent="0" marL="0">
+              <a:lnSpc>
+                <a:spcPct val="120000"/>
+              </a:lnSpc>
+              <a:buNone/>
+            </a:pPr>
+            <a:r>
+              <a:rPr lang="en-US" sz="2200" dirty="0">
+                <a:solidFill>
+                  <a:srgbClr val="1F2937"/>
+                </a:solidFill>
+                <a:latin typeface="Pretendard" pitchFamily="34" charset="0"/>
+                <a:ea typeface="Pretendard" pitchFamily="34" charset="-122"/>
+                <a:cs typeface="Pretendard" pitchFamily="34" charset="-120"/>
+              </a:rPr>
+              <a:t>Ranked Bars Proof Object</a:t>
+            </a:r>
+            <a:endParaRPr lang="en-US" sz="2200" dirty="0"/>
+          </a:p>
+        </p:txBody>
+      </p:sp>
+      <p:sp>
+        <p:nvSpPr>
+          <p:cNvPr id="15" name="Text 13"/>
+          <p:cNvSpPr txBox="1"/>
+          <p:nvPr/>
+        </p:nvSpPr>
+        <p:spPr>
+          <a:xfrm>
             <a:off x="987552" y="4928616"/>
+            <a:ext cx="10094976" cy="408432"/>
+          </a:xfrm>
+          <a:prstGeom prst="rect">
+            <a:avLst/>
+          </a:prstGeom>
+          <a:noFill/>
+          <a:ln/>
+        </p:spPr>
+        <p:txBody>
+          <a:bodyPr wrap="square" lIns="0" tIns="25400" rIns="25400" bIns="0" rtlCol="0" anchor="ctr">
+            <a:normAutofit/>
+          </a:bodyPr>
+          <a:lstStyle/>
+          <a:p>
+            <a:pPr algn="l" indent="0" marL="0">
+              <a:lnSpc>
+                <a:spcPct val="120000"/>
+              </a:lnSpc>
+              <a:buNone/>
+            </a:pPr>
+            <a:r>
+              <a:rPr lang="en-US" sz="2200" dirty="0">
+                <a:solidFill>
+                  <a:srgbClr val="1F2937"/>
+                </a:solidFill>
+                <a:latin typeface="Pretendard" pitchFamily="34" charset="0"/>
+                <a:ea typeface="Pretendard" pitchFamily="34" charset="-122"/>
+                <a:cs typeface="Pretendard" pitchFamily="34" charset="-120"/>
+              </a:rPr>
+              <a:t>Metric Dots Proof Object</a:t>
+            </a:r>
+            <a:endParaRPr lang="en-US" sz="2200" dirty="0"/>
+          </a:p>
+        </p:txBody>
+      </p:sp>
+      <p:sp>
+        <p:nvSpPr>
+          <p:cNvPr id="16" name="Text 14"/>
+          <p:cNvSpPr txBox="1"/>
+          <p:nvPr/>
+        </p:nvSpPr>
+        <p:spPr>
+          <a:xfrm>
+            <a:off x="987552" y="5337048"/>
             <a:ext cx="10094976" cy="408432"/>
           </a:xfrm>
           <a:prstGeom prst="rect">
@@ -4537,11 +6565,11 @@
             <a:avLst/>
           </a:prstGeom>
           <a:solidFill>
-            <a:srgbClr val="EB4A25"/>
-          </a:solidFill>
-          <a:ln w="12700">
-            <a:solidFill>
-              <a:srgbClr val="EB4A25">
+            <a:srgbClr val="F03A11"/>
+          </a:solidFill>
+          <a:ln w="12700">
+            <a:solidFill>
+              <a:srgbClr val="F03A11">
                 <a:alpha val="0"/>
               </a:srgbClr>
             </a:solidFill>
@@ -4564,11 +6592,11 @@
             <a:avLst/>
           </a:prstGeom>
           <a:solidFill>
-            <a:srgbClr val="C6EB25"/>
-          </a:solidFill>
-          <a:ln w="12700">
-            <a:solidFill>
-              <a:srgbClr val="C6EB25">
+            <a:srgbClr val="C7F015"/>
+          </a:solidFill>
+          <a:ln w="12700">
+            <a:solidFill>
+              <a:srgbClr val="C7F015">
                 <a:alpha val="0"/>
               </a:srgbClr>
             </a:solidFill>
@@ -4618,11 +6646,11 @@
             <a:avLst/>
           </a:prstGeom>
           <a:solidFill>
-            <a:srgbClr val="EB4A25"/>
-          </a:solidFill>
-          <a:ln w="12700">
-            <a:solidFill>
-              <a:srgbClr val="EB4A25">
+            <a:srgbClr val="F03A11"/>
+          </a:solidFill>
+          <a:ln w="12700">
+            <a:solidFill>
+              <a:srgbClr val="F03A11">
                 <a:alpha val="0"/>
               </a:srgbClr>
             </a:solidFill>
@@ -4672,11 +6700,11 @@
             <a:avLst/>
           </a:prstGeom>
           <a:solidFill>
-            <a:srgbClr val="EB4A25"/>
-          </a:solidFill>
-          <a:ln w="12700">
-            <a:solidFill>
-              <a:srgbClr val="EB4A25">
+            <a:srgbClr val="F03A11"/>
+          </a:solidFill>
+          <a:ln w="12700">
+            <a:solidFill>
+              <a:srgbClr val="F03A11">
                 <a:alpha val="0"/>
               </a:srgbClr>
             </a:solidFill>
@@ -4879,13 +6907,11 @@
         </p:nvSpPr>
         <p:spPr>
           <a:xfrm>
-            <a:off x="1101943" y="2238817"/>
-            <a:ext cx="210678" cy="272125"/>
-          </a:xfrm>
-          <a:prstGeom prst="roundRect">
-            <a:avLst>
-              <a:gd name="adj" fmla="val 17361"/>
-            </a:avLst>
+            <a:off x="1110722" y="2378918"/>
+            <a:ext cx="63203" cy="63203"/>
+          </a:xfrm>
+          <a:prstGeom prst="ellipse">
+            <a:avLst/>
           </a:prstGeom>
           <a:solidFill>
             <a:srgbClr val="1F2937"/>
@@ -4908,18 +6934,18 @@
         </p:nvSpPr>
         <p:spPr>
           <a:xfrm>
-            <a:off x="1154613" y="2309043"/>
-            <a:ext cx="109728" cy="15362"/>
-          </a:xfrm>
-          <a:prstGeom prst="rect">
-            <a:avLst/>
-          </a:prstGeom>
-          <a:solidFill>
-            <a:srgbClr val="FFFFFF"/>
-          </a:solidFill>
-          <a:ln w="12700">
-            <a:solidFill>
-              <a:srgbClr val="FFFFFF">
+            <a:off x="1230808" y="2378918"/>
+            <a:ext cx="63203" cy="63203"/>
+          </a:xfrm>
+          <a:prstGeom prst="ellipse">
+            <a:avLst/>
+          </a:prstGeom>
+          <a:solidFill>
+            <a:srgbClr val="1F2937"/>
+          </a:solidFill>
+          <a:ln w="12700">
+            <a:solidFill>
+              <a:srgbClr val="1F2937">
                 <a:alpha val="0"/>
               </a:srgbClr>
             </a:solidFill>
@@ -4935,18 +6961,18 @@
         </p:nvSpPr>
         <p:spPr>
           <a:xfrm>
-            <a:off x="1154613" y="2366101"/>
-            <a:ext cx="109728" cy="15362"/>
-          </a:xfrm>
-          <a:prstGeom prst="rect">
-            <a:avLst/>
-          </a:prstGeom>
-          <a:solidFill>
-            <a:srgbClr val="FFFFFF"/>
-          </a:solidFill>
-          <a:ln w="12700">
-            <a:solidFill>
-              <a:srgbClr val="FFFFFF">
+            <a:off x="1350894" y="2378918"/>
+            <a:ext cx="63203" cy="63203"/>
+          </a:xfrm>
+          <a:prstGeom prst="ellipse">
+            <a:avLst/>
+          </a:prstGeom>
+          <a:solidFill>
+            <a:srgbClr val="1F2937"/>
+          </a:solidFill>
+          <a:ln w="12700">
+            <a:solidFill>
+              <a:srgbClr val="1F2937">
                 <a:alpha val="0"/>
               </a:srgbClr>
             </a:solidFill>
@@ -4962,28 +6988,55 @@
         </p:nvSpPr>
         <p:spPr>
           <a:xfrm>
-            <a:off x="1154613" y="2423160"/>
-            <a:ext cx="109728" cy="15362"/>
-          </a:xfrm>
-          <a:prstGeom prst="rect">
-            <a:avLst/>
-          </a:prstGeom>
-          <a:solidFill>
-            <a:srgbClr val="FFFFFF"/>
-          </a:solidFill>
-          <a:ln w="12700">
-            <a:solidFill>
-              <a:srgbClr val="FFFFFF">
-                <a:alpha val="0"/>
-              </a:srgbClr>
-            </a:solidFill>
-            <a:prstDash val="solid"/>
-          </a:ln>
-        </p:spPr>
-      </p:sp>
-      <p:sp>
-        <p:nvSpPr>
-          <p:cNvPr id="19" name="Text 17"/>
+            <a:off x="1173925" y="2407359"/>
+            <a:ext cx="69524" cy="14221"/>
+          </a:xfrm>
+          <a:prstGeom prst="rect">
+            <a:avLst/>
+          </a:prstGeom>
+          <a:solidFill>
+            <a:srgbClr val="1F2937"/>
+          </a:solidFill>
+          <a:ln w="12700">
+            <a:solidFill>
+              <a:srgbClr val="1F2937">
+                <a:alpha val="0"/>
+              </a:srgbClr>
+            </a:solidFill>
+            <a:prstDash val="solid"/>
+          </a:ln>
+        </p:spPr>
+      </p:sp>
+      <p:sp>
+        <p:nvSpPr>
+          <p:cNvPr id="19" name="Shape 17"/>
+          <p:cNvSpPr/>
+          <p:nvPr/>
+        </p:nvSpPr>
+        <p:spPr>
+          <a:xfrm>
+            <a:off x="1294011" y="2407359"/>
+            <a:ext cx="69524" cy="14221"/>
+          </a:xfrm>
+          <a:prstGeom prst="rect">
+            <a:avLst/>
+          </a:prstGeom>
+          <a:solidFill>
+            <a:srgbClr val="1F2937"/>
+          </a:solidFill>
+          <a:ln w="12700">
+            <a:solidFill>
+              <a:srgbClr val="1F2937">
+                <a:alpha val="0"/>
+              </a:srgbClr>
+            </a:solidFill>
+            <a:prstDash val="solid"/>
+          </a:ln>
+        </p:spPr>
+      </p:sp>
+      <p:sp>
+        <p:nvSpPr>
+          <p:cNvPr id="20" name="Text 18"/>
           <p:cNvSpPr txBox="1"/>
           <p:nvPr/>
         </p:nvSpPr>
@@ -5027,7 +7080,7 @@
       </p:sp>
       <p:sp>
         <p:nvSpPr>
-          <p:cNvPr id="20" name="Shape 18"/>
+          <p:cNvPr id="21" name="Shape 19"/>
           <p:cNvSpPr/>
           <p:nvPr/>
         </p:nvSpPr>
@@ -5054,16 +7107,16 @@
       </p:sp>
       <p:sp>
         <p:nvSpPr>
-          <p:cNvPr id="21" name="Shape 19"/>
-          <p:cNvSpPr/>
-          <p:nvPr/>
-        </p:nvSpPr>
-        <p:spPr>
-          <a:xfrm>
-            <a:off x="6588343" y="2361712"/>
-            <a:ext cx="79004" cy="79004"/>
-          </a:xfrm>
-          <a:prstGeom prst="ellipse">
+          <p:cNvPr id="22" name="Shape 20"/>
+          <p:cNvSpPr/>
+          <p:nvPr/>
+        </p:nvSpPr>
+        <p:spPr>
+          <a:xfrm rot="10800000">
+            <a:off x="6635044" y="2284113"/>
+            <a:ext cx="240173" cy="265454"/>
+          </a:xfrm>
+          <a:prstGeom prst="pentagon">
             <a:avLst/>
           </a:prstGeom>
           <a:solidFill>
@@ -5081,115 +7134,34 @@
       </p:sp>
       <p:sp>
         <p:nvSpPr>
-          <p:cNvPr id="22" name="Shape 20"/>
-          <p:cNvSpPr/>
-          <p:nvPr/>
-        </p:nvSpPr>
-        <p:spPr>
-          <a:xfrm>
-            <a:off x="6755130" y="2361712"/>
-            <a:ext cx="79004" cy="79004"/>
-          </a:xfrm>
-          <a:prstGeom prst="ellipse">
-            <a:avLst/>
-          </a:prstGeom>
-          <a:solidFill>
-            <a:srgbClr val="1F2937"/>
-          </a:solidFill>
-          <a:ln w="12700">
-            <a:solidFill>
-              <a:srgbClr val="1F2937">
-                <a:alpha val="0"/>
-              </a:srgbClr>
-            </a:solidFill>
-            <a:prstDash val="solid"/>
-          </a:ln>
-        </p:spPr>
-      </p:sp>
-      <p:sp>
-        <p:nvSpPr>
           <p:cNvPr id="23" name="Shape 21"/>
           <p:cNvSpPr/>
           <p:nvPr/>
         </p:nvSpPr>
         <p:spPr>
-          <a:xfrm>
-            <a:off x="6921917" y="2361712"/>
-            <a:ext cx="79004" cy="79004"/>
-          </a:xfrm>
-          <a:prstGeom prst="ellipse">
-            <a:avLst/>
-          </a:prstGeom>
-          <a:solidFill>
-            <a:srgbClr val="1F2937"/>
-          </a:solidFill>
-          <a:ln w="12700">
-            <a:solidFill>
-              <a:srgbClr val="1F2937">
-                <a:alpha val="0"/>
-              </a:srgbClr>
-            </a:solidFill>
-            <a:prstDash val="solid"/>
-          </a:ln>
-        </p:spPr>
-      </p:sp>
-      <p:sp>
-        <p:nvSpPr>
-          <p:cNvPr id="24" name="Shape 22"/>
-          <p:cNvSpPr/>
-          <p:nvPr/>
-        </p:nvSpPr>
-        <p:spPr>
-          <a:xfrm>
-            <a:off x="6662958" y="2396825"/>
-            <a:ext cx="96561" cy="15362"/>
-          </a:xfrm>
-          <a:prstGeom prst="rect">
-            <a:avLst/>
-          </a:prstGeom>
-          <a:solidFill>
-            <a:srgbClr val="1F2937"/>
-          </a:solidFill>
-          <a:ln w="12700">
-            <a:solidFill>
-              <a:srgbClr val="1F2937">
-                <a:alpha val="0"/>
-              </a:srgbClr>
-            </a:solidFill>
-            <a:prstDash val="solid"/>
-          </a:ln>
-        </p:spPr>
-      </p:sp>
-      <p:sp>
-        <p:nvSpPr>
-          <p:cNvPr id="25" name="Shape 23"/>
-          <p:cNvSpPr/>
-          <p:nvPr/>
-        </p:nvSpPr>
-        <p:spPr>
-          <a:xfrm>
-            <a:off x="6829745" y="2396825"/>
-            <a:ext cx="96561" cy="15362"/>
-          </a:xfrm>
-          <a:prstGeom prst="rect">
-            <a:avLst/>
-          </a:prstGeom>
-          <a:solidFill>
-            <a:srgbClr val="1F2937"/>
-          </a:solidFill>
-          <a:ln w="12700">
-            <a:solidFill>
-              <a:srgbClr val="1F2937">
-                <a:alpha val="0"/>
-              </a:srgbClr>
-            </a:solidFill>
-            <a:prstDash val="solid"/>
-          </a:ln>
-        </p:spPr>
-      </p:sp>
-      <p:sp>
-        <p:nvSpPr>
-          <p:cNvPr id="26" name="Text 24"/>
+          <a:xfrm rot="2100000">
+            <a:off x="6739329" y="2353636"/>
+            <a:ext cx="34762" cy="120086"/>
+          </a:xfrm>
+          <a:prstGeom prst="rect">
+            <a:avLst/>
+          </a:prstGeom>
+          <a:solidFill>
+            <a:srgbClr val="FFFFFF"/>
+          </a:solidFill>
+          <a:ln w="12700">
+            <a:solidFill>
+              <a:srgbClr val="FFFFFF">
+                <a:alpha val="0"/>
+              </a:srgbClr>
+            </a:solidFill>
+            <a:prstDash val="solid"/>
+          </a:ln>
+        </p:spPr>
+      </p:sp>
+      <p:sp>
+        <p:nvSpPr>
+          <p:cNvPr id="24" name="Text 22"/>
           <p:cNvSpPr txBox="1"/>
           <p:nvPr/>
         </p:nvSpPr>
@@ -5233,7 +7205,7 @@
       </p:sp>
       <p:sp>
         <p:nvSpPr>
-          <p:cNvPr id="27" name="Shape 25"/>
+          <p:cNvPr id="25" name="Shape 23"/>
           <p:cNvSpPr/>
           <p:nvPr/>
         </p:nvSpPr>
@@ -5260,16 +7232,70 @@
       </p:sp>
       <p:sp>
         <p:nvSpPr>
+          <p:cNvPr id="26" name="Shape 24"/>
+          <p:cNvSpPr/>
+          <p:nvPr/>
+        </p:nvSpPr>
+        <p:spPr>
+          <a:xfrm>
+            <a:off x="1199206" y="4551152"/>
+            <a:ext cx="101125" cy="101125"/>
+          </a:xfrm>
+          <a:prstGeom prst="diamond">
+            <a:avLst/>
+          </a:prstGeom>
+          <a:solidFill>
+            <a:srgbClr val="1F2937"/>
+          </a:solidFill>
+          <a:ln w="12700">
+            <a:solidFill>
+              <a:srgbClr val="1F2937">
+                <a:alpha val="0"/>
+              </a:srgbClr>
+            </a:solidFill>
+            <a:prstDash val="solid"/>
+          </a:ln>
+        </p:spPr>
+      </p:sp>
+      <p:sp>
+        <p:nvSpPr>
+          <p:cNvPr id="27" name="Shape 25"/>
+          <p:cNvSpPr/>
+          <p:nvPr/>
+        </p:nvSpPr>
+        <p:spPr>
+          <a:xfrm>
+            <a:off x="1126523" y="4693359"/>
+            <a:ext cx="63203" cy="63203"/>
+          </a:xfrm>
+          <a:prstGeom prst="diamond">
+            <a:avLst/>
+          </a:prstGeom>
+          <a:solidFill>
+            <a:srgbClr val="1F2937"/>
+          </a:solidFill>
+          <a:ln w="12700">
+            <a:solidFill>
+              <a:srgbClr val="1F2937">
+                <a:alpha val="0"/>
+              </a:srgbClr>
+            </a:solidFill>
+            <a:prstDash val="solid"/>
+          </a:ln>
+        </p:spPr>
+      </p:sp>
+      <p:sp>
+        <p:nvSpPr>
           <p:cNvPr id="28" name="Shape 26"/>
           <p:cNvSpPr/>
           <p:nvPr/>
         </p:nvSpPr>
         <p:spPr>
-          <a:xfrm rot="10800000">
-            <a:off x="1101943" y="4524817"/>
-            <a:ext cx="241402" cy="285293"/>
-          </a:xfrm>
-          <a:prstGeom prst="pentagon">
+          <a:xfrm>
+            <a:off x="1306652" y="4724961"/>
+            <a:ext cx="69524" cy="69524"/>
+          </a:xfrm>
+          <a:prstGeom prst="diamond">
             <a:avLst/>
           </a:prstGeom>
           <a:solidFill>
@@ -5287,34 +7313,7 @@
       </p:sp>
       <p:sp>
         <p:nvSpPr>
-          <p:cNvPr id="29" name="Shape 27"/>
-          <p:cNvSpPr/>
-          <p:nvPr/>
-        </p:nvSpPr>
-        <p:spPr>
-          <a:xfrm>
-            <a:off x="1198504" y="4577486"/>
-            <a:ext cx="43891" cy="122895"/>
-          </a:xfrm>
-          <a:prstGeom prst="rect">
-            <a:avLst/>
-          </a:prstGeom>
-          <a:solidFill>
-            <a:srgbClr val="FFFFFF"/>
-          </a:solidFill>
-          <a:ln w="12700">
-            <a:solidFill>
-              <a:srgbClr val="FFFFFF">
-                <a:alpha val="0"/>
-              </a:srgbClr>
-            </a:solidFill>
-            <a:prstDash val="solid"/>
-          </a:ln>
-        </p:spPr>
-      </p:sp>
-      <p:sp>
-        <p:nvSpPr>
-          <p:cNvPr id="30" name="Text 28"/>
+          <p:cNvPr id="29" name="Text 27"/>
           <p:cNvSpPr txBox="1"/>
           <p:nvPr/>
         </p:nvSpPr>
@@ -5358,7 +7357,7 @@
       </p:sp>
       <p:sp>
         <p:nvSpPr>
-          <p:cNvPr id="31" name="Shape 29"/>
+          <p:cNvPr id="30" name="Shape 28"/>
           <p:cNvSpPr/>
           <p:nvPr/>
         </p:nvSpPr>
@@ -5385,16 +7384,43 @@
       </p:sp>
       <p:sp>
         <p:nvSpPr>
+          <p:cNvPr id="31" name="Shape 29"/>
+          <p:cNvSpPr/>
+          <p:nvPr/>
+        </p:nvSpPr>
+        <p:spPr>
+          <a:xfrm>
+            <a:off x="6647684" y="4687039"/>
+            <a:ext cx="41082" cy="110606"/>
+          </a:xfrm>
+          <a:prstGeom prst="rect">
+            <a:avLst/>
+          </a:prstGeom>
+          <a:solidFill>
+            <a:srgbClr val="1F2937"/>
+          </a:solidFill>
+          <a:ln w="12700">
+            <a:solidFill>
+              <a:srgbClr val="1F2937">
+                <a:alpha val="0"/>
+              </a:srgbClr>
+            </a:solidFill>
+            <a:prstDash val="solid"/>
+          </a:ln>
+        </p:spPr>
+      </p:sp>
+      <p:sp>
+        <p:nvSpPr>
           <p:cNvPr id="32" name="Shape 30"/>
           <p:cNvSpPr/>
           <p:nvPr/>
         </p:nvSpPr>
         <p:spPr>
           <a:xfrm>
-            <a:off x="6588343" y="4647712"/>
-            <a:ext cx="79004" cy="79004"/>
-          </a:xfrm>
-          <a:prstGeom prst="ellipse">
+            <a:off x="6726689" y="4601714"/>
+            <a:ext cx="41082" cy="195930"/>
+          </a:xfrm>
+          <a:prstGeom prst="rect">
             <a:avLst/>
           </a:prstGeom>
           <a:solidFill>
@@ -5418,10 +7444,10 @@
         </p:nvSpPr>
         <p:spPr>
           <a:xfrm>
-            <a:off x="6755130" y="4647712"/>
-            <a:ext cx="79004" cy="79004"/>
-          </a:xfrm>
-          <a:prstGeom prst="ellipse">
+            <a:off x="6805693" y="4645957"/>
+            <a:ext cx="41082" cy="151688"/>
+          </a:xfrm>
+          <a:prstGeom prst="rect">
             <a:avLst/>
           </a:prstGeom>
           <a:solidFill>
@@ -5439,88 +7465,7 @@
       </p:sp>
       <p:sp>
         <p:nvSpPr>
-          <p:cNvPr id="34" name="Shape 32"/>
-          <p:cNvSpPr/>
-          <p:nvPr/>
-        </p:nvSpPr>
-        <p:spPr>
-          <a:xfrm>
-            <a:off x="6921917" y="4647712"/>
-            <a:ext cx="79004" cy="79004"/>
-          </a:xfrm>
-          <a:prstGeom prst="ellipse">
-            <a:avLst/>
-          </a:prstGeom>
-          <a:solidFill>
-            <a:srgbClr val="1F2937"/>
-          </a:solidFill>
-          <a:ln w="12700">
-            <a:solidFill>
-              <a:srgbClr val="1F2937">
-                <a:alpha val="0"/>
-              </a:srgbClr>
-            </a:solidFill>
-            <a:prstDash val="solid"/>
-          </a:ln>
-        </p:spPr>
-      </p:sp>
-      <p:sp>
-        <p:nvSpPr>
-          <p:cNvPr id="35" name="Shape 33"/>
-          <p:cNvSpPr/>
-          <p:nvPr/>
-        </p:nvSpPr>
-        <p:spPr>
-          <a:xfrm>
-            <a:off x="6662958" y="4682825"/>
-            <a:ext cx="96561" cy="15362"/>
-          </a:xfrm>
-          <a:prstGeom prst="rect">
-            <a:avLst/>
-          </a:prstGeom>
-          <a:solidFill>
-            <a:srgbClr val="1F2937"/>
-          </a:solidFill>
-          <a:ln w="12700">
-            <a:solidFill>
-              <a:srgbClr val="1F2937">
-                <a:alpha val="0"/>
-              </a:srgbClr>
-            </a:solidFill>
-            <a:prstDash val="solid"/>
-          </a:ln>
-        </p:spPr>
-      </p:sp>
-      <p:sp>
-        <p:nvSpPr>
-          <p:cNvPr id="36" name="Shape 34"/>
-          <p:cNvSpPr/>
-          <p:nvPr/>
-        </p:nvSpPr>
-        <p:spPr>
-          <a:xfrm>
-            <a:off x="6829745" y="4682825"/>
-            <a:ext cx="96561" cy="15362"/>
-          </a:xfrm>
-          <a:prstGeom prst="rect">
-            <a:avLst/>
-          </a:prstGeom>
-          <a:solidFill>
-            <a:srgbClr val="1F2937"/>
-          </a:solidFill>
-          <a:ln w="12700">
-            <a:solidFill>
-              <a:srgbClr val="1F2937">
-                <a:alpha val="0"/>
-              </a:srgbClr>
-            </a:solidFill>
-            <a:prstDash val="solid"/>
-          </a:ln>
-        </p:spPr>
-      </p:sp>
-      <p:sp>
-        <p:nvSpPr>
-          <p:cNvPr id="37" name="Text 35"/>
+          <p:cNvPr id="34" name="Text 32"/>
           <p:cNvSpPr txBox="1"/>
           <p:nvPr/>
         </p:nvSpPr>
@@ -5636,11 +7581,11 @@
             <a:avLst/>
           </a:prstGeom>
           <a:solidFill>
-            <a:srgbClr val="EB4A25"/>
-          </a:solidFill>
-          <a:ln w="12700">
-            <a:solidFill>
-              <a:srgbClr val="EB4A25">
+            <a:srgbClr val="F03A11"/>
+          </a:solidFill>
+          <a:ln w="12700">
+            <a:solidFill>
+              <a:srgbClr val="F03A11">
                 <a:alpha val="0"/>
               </a:srgbClr>
             </a:solidFill>
@@ -5663,11 +7608,11 @@
             <a:avLst/>
           </a:prstGeom>
           <a:solidFill>
-            <a:srgbClr val="C6EB25"/>
-          </a:solidFill>
-          <a:ln w="12700">
-            <a:solidFill>
-              <a:srgbClr val="C6EB25">
+            <a:srgbClr val="C7F015"/>
+          </a:solidFill>
+          <a:ln w="12700">
+            <a:solidFill>
+              <a:srgbClr val="C7F015">
                 <a:alpha val="0"/>
               </a:srgbClr>
             </a:solidFill>
@@ -5717,11 +7662,11 @@
             <a:avLst/>
           </a:prstGeom>
           <a:solidFill>
-            <a:srgbClr val="EB4A25"/>
-          </a:solidFill>
-          <a:ln w="12700">
-            <a:solidFill>
-              <a:srgbClr val="EB4A25">
+            <a:srgbClr val="F03A11"/>
+          </a:solidFill>
+          <a:ln w="12700">
+            <a:solidFill>
+              <a:srgbClr val="F03A11">
                 <a:alpha val="0"/>
               </a:srgbClr>
             </a:solidFill>
@@ -5922,13 +7867,11 @@
         </p:nvSpPr>
         <p:spPr>
           <a:xfrm>
-            <a:off x="1207740" y="1721084"/>
-            <a:ext cx="149230" cy="192756"/>
-          </a:xfrm>
-          <a:prstGeom prst="roundRect">
-            <a:avLst>
-              <a:gd name="adj" fmla="val 24510"/>
-            </a:avLst>
+            <a:off x="1213957" y="1820322"/>
+            <a:ext cx="44769" cy="44769"/>
+          </a:xfrm>
+          <a:prstGeom prst="ellipse">
+            <a:avLst/>
           </a:prstGeom>
           <a:solidFill>
             <a:srgbClr val="1F2937"/>
@@ -5951,18 +7894,18 @@
         </p:nvSpPr>
         <p:spPr>
           <a:xfrm>
-            <a:off x="1245047" y="1770827"/>
-            <a:ext cx="77724" cy="10881"/>
-          </a:xfrm>
-          <a:prstGeom prst="rect">
-            <a:avLst/>
-          </a:prstGeom>
-          <a:solidFill>
-            <a:srgbClr val="FFFFFF"/>
-          </a:solidFill>
-          <a:ln w="12700">
-            <a:solidFill>
-              <a:srgbClr val="FFFFFF">
+            <a:off x="1299019" y="1820322"/>
+            <a:ext cx="44769" cy="44769"/>
+          </a:xfrm>
+          <a:prstGeom prst="ellipse">
+            <a:avLst/>
+          </a:prstGeom>
+          <a:solidFill>
+            <a:srgbClr val="1F2937"/>
+          </a:solidFill>
+          <a:ln w="12700">
+            <a:solidFill>
+              <a:srgbClr val="1F2937">
                 <a:alpha val="0"/>
               </a:srgbClr>
             </a:solidFill>
@@ -5978,18 +7921,18 @@
         </p:nvSpPr>
         <p:spPr>
           <a:xfrm>
-            <a:off x="1245047" y="1811244"/>
-            <a:ext cx="77724" cy="10881"/>
-          </a:xfrm>
-          <a:prstGeom prst="rect">
-            <a:avLst/>
-          </a:prstGeom>
-          <a:solidFill>
-            <a:srgbClr val="FFFFFF"/>
-          </a:solidFill>
-          <a:ln w="12700">
-            <a:solidFill>
-              <a:srgbClr val="FFFFFF">
+            <a:off x="1384080" y="1820322"/>
+            <a:ext cx="44769" cy="44769"/>
+          </a:xfrm>
+          <a:prstGeom prst="ellipse">
+            <a:avLst/>
+          </a:prstGeom>
+          <a:solidFill>
+            <a:srgbClr val="1F2937"/>
+          </a:solidFill>
+          <a:ln w="12700">
+            <a:solidFill>
+              <a:srgbClr val="1F2937">
                 <a:alpha val="0"/>
               </a:srgbClr>
             </a:solidFill>
@@ -6005,28 +7948,55 @@
         </p:nvSpPr>
         <p:spPr>
           <a:xfrm>
-            <a:off x="1245047" y="1851660"/>
-            <a:ext cx="77724" cy="10881"/>
-          </a:xfrm>
-          <a:prstGeom prst="rect">
-            <a:avLst/>
-          </a:prstGeom>
-          <a:solidFill>
-            <a:srgbClr val="FFFFFF"/>
-          </a:solidFill>
-          <a:ln w="12700">
-            <a:solidFill>
-              <a:srgbClr val="FFFFFF">
-                <a:alpha val="0"/>
-              </a:srgbClr>
-            </a:solidFill>
-            <a:prstDash val="solid"/>
-          </a:ln>
-        </p:spPr>
-      </p:sp>
-      <p:sp>
-        <p:nvSpPr>
-          <p:cNvPr id="17" name="Text 15"/>
+            <a:off x="1258726" y="1840468"/>
+            <a:ext cx="49246" cy="10073"/>
+          </a:xfrm>
+          <a:prstGeom prst="rect">
+            <a:avLst/>
+          </a:prstGeom>
+          <a:solidFill>
+            <a:srgbClr val="1F2937"/>
+          </a:solidFill>
+          <a:ln w="12700">
+            <a:solidFill>
+              <a:srgbClr val="1F2937">
+                <a:alpha val="0"/>
+              </a:srgbClr>
+            </a:solidFill>
+            <a:prstDash val="solid"/>
+          </a:ln>
+        </p:spPr>
+      </p:sp>
+      <p:sp>
+        <p:nvSpPr>
+          <p:cNvPr id="17" name="Shape 15"/>
+          <p:cNvSpPr/>
+          <p:nvPr/>
+        </p:nvSpPr>
+        <p:spPr>
+          <a:xfrm>
+            <a:off x="1343788" y="1840468"/>
+            <a:ext cx="49246" cy="10073"/>
+          </a:xfrm>
+          <a:prstGeom prst="rect">
+            <a:avLst/>
+          </a:prstGeom>
+          <a:solidFill>
+            <a:srgbClr val="1F2937"/>
+          </a:solidFill>
+          <a:ln w="12700">
+            <a:solidFill>
+              <a:srgbClr val="1F2937">
+                <a:alpha val="0"/>
+              </a:srgbClr>
+            </a:solidFill>
+            <a:prstDash val="solid"/>
+          </a:ln>
+        </p:spPr>
+      </p:sp>
+      <p:sp>
+        <p:nvSpPr>
+          <p:cNvPr id="18" name="Text 16"/>
           <p:cNvSpPr txBox="1"/>
           <p:nvPr/>
         </p:nvSpPr>
@@ -6070,7 +8040,7 @@
       </p:sp>
       <p:sp>
         <p:nvSpPr>
-          <p:cNvPr id="18" name="Shape 16"/>
+          <p:cNvPr id="19" name="Shape 17"/>
           <p:cNvSpPr/>
           <p:nvPr/>
         </p:nvSpPr>
@@ -6097,16 +8067,16 @@
       </p:sp>
       <p:sp>
         <p:nvSpPr>
-          <p:cNvPr id="19" name="Shape 17"/>
-          <p:cNvSpPr/>
-          <p:nvPr/>
-        </p:nvSpPr>
-        <p:spPr>
-          <a:xfrm>
-            <a:off x="1207740" y="2951135"/>
-            <a:ext cx="55961" cy="55961"/>
-          </a:xfrm>
-          <a:prstGeom prst="ellipse">
+          <p:cNvPr id="20" name="Shape 18"/>
+          <p:cNvSpPr/>
+          <p:nvPr/>
+        </p:nvSpPr>
+        <p:spPr>
+          <a:xfrm rot="10800000">
+            <a:off x="1240819" y="2896168"/>
+            <a:ext cx="170122" cy="188030"/>
+          </a:xfrm>
+          <a:prstGeom prst="pentagon">
             <a:avLst/>
           </a:prstGeom>
           <a:solidFill>
@@ -6124,115 +8094,34 @@
       </p:sp>
       <p:sp>
         <p:nvSpPr>
-          <p:cNvPr id="20" name="Shape 18"/>
-          <p:cNvSpPr/>
-          <p:nvPr/>
-        </p:nvSpPr>
-        <p:spPr>
-          <a:xfrm>
-            <a:off x="1325880" y="2951135"/>
-            <a:ext cx="55961" cy="55961"/>
-          </a:xfrm>
-          <a:prstGeom prst="ellipse">
-            <a:avLst/>
-          </a:prstGeom>
-          <a:solidFill>
-            <a:srgbClr val="1F2937"/>
-          </a:solidFill>
-          <a:ln w="12700">
-            <a:solidFill>
-              <a:srgbClr val="1F2937">
-                <a:alpha val="0"/>
-              </a:srgbClr>
-            </a:solidFill>
-            <a:prstDash val="solid"/>
-          </a:ln>
-        </p:spPr>
-      </p:sp>
-      <p:sp>
-        <p:nvSpPr>
           <p:cNvPr id="21" name="Shape 19"/>
           <p:cNvSpPr/>
           <p:nvPr/>
         </p:nvSpPr>
         <p:spPr>
-          <a:xfrm>
-            <a:off x="1444020" y="2951135"/>
-            <a:ext cx="55961" cy="55961"/>
-          </a:xfrm>
-          <a:prstGeom prst="ellipse">
-            <a:avLst/>
-          </a:prstGeom>
-          <a:solidFill>
-            <a:srgbClr val="1F2937"/>
-          </a:solidFill>
-          <a:ln w="12700">
-            <a:solidFill>
-              <a:srgbClr val="1F2937">
-                <a:alpha val="0"/>
-              </a:srgbClr>
-            </a:solidFill>
-            <a:prstDash val="solid"/>
-          </a:ln>
-        </p:spPr>
-      </p:sp>
-      <p:sp>
-        <p:nvSpPr>
-          <p:cNvPr id="22" name="Shape 20"/>
-          <p:cNvSpPr/>
-          <p:nvPr/>
-        </p:nvSpPr>
-        <p:spPr>
-          <a:xfrm>
-            <a:off x="1260592" y="2976006"/>
-            <a:ext cx="68397" cy="10881"/>
-          </a:xfrm>
-          <a:prstGeom prst="rect">
-            <a:avLst/>
-          </a:prstGeom>
-          <a:solidFill>
-            <a:srgbClr val="1F2937"/>
-          </a:solidFill>
-          <a:ln w="12700">
-            <a:solidFill>
-              <a:srgbClr val="1F2937">
-                <a:alpha val="0"/>
-              </a:srgbClr>
-            </a:solidFill>
-            <a:prstDash val="solid"/>
-          </a:ln>
-        </p:spPr>
-      </p:sp>
-      <p:sp>
-        <p:nvSpPr>
-          <p:cNvPr id="23" name="Shape 21"/>
-          <p:cNvSpPr/>
-          <p:nvPr/>
-        </p:nvSpPr>
-        <p:spPr>
-          <a:xfrm>
-            <a:off x="1378732" y="2976006"/>
-            <a:ext cx="68397" cy="10881"/>
-          </a:xfrm>
-          <a:prstGeom prst="rect">
-            <a:avLst/>
-          </a:prstGeom>
-          <a:solidFill>
-            <a:srgbClr val="1F2937"/>
-          </a:solidFill>
-          <a:ln w="12700">
-            <a:solidFill>
-              <a:srgbClr val="1F2937">
-                <a:alpha val="0"/>
-              </a:srgbClr>
-            </a:solidFill>
-            <a:prstDash val="solid"/>
-          </a:ln>
-        </p:spPr>
-      </p:sp>
-      <p:sp>
-        <p:nvSpPr>
-          <p:cNvPr id="24" name="Text 22"/>
+          <a:xfrm rot="2100000">
+            <a:off x="1314688" y="2945414"/>
+            <a:ext cx="24623" cy="85061"/>
+          </a:xfrm>
+          <a:prstGeom prst="rect">
+            <a:avLst/>
+          </a:prstGeom>
+          <a:solidFill>
+            <a:srgbClr val="FFFFFF"/>
+          </a:solidFill>
+          <a:ln w="12700">
+            <a:solidFill>
+              <a:srgbClr val="FFFFFF">
+                <a:alpha val="0"/>
+              </a:srgbClr>
+            </a:solidFill>
+            <a:prstDash val="solid"/>
+          </a:ln>
+        </p:spPr>
+      </p:sp>
+      <p:sp>
+        <p:nvSpPr>
+          <p:cNvPr id="22" name="Text 20"/>
           <p:cNvSpPr txBox="1"/>
           <p:nvPr/>
         </p:nvSpPr>
@@ -6276,7 +8165,7 @@
       </p:sp>
       <p:sp>
         <p:nvSpPr>
-          <p:cNvPr id="25" name="Shape 23"/>
+          <p:cNvPr id="23" name="Shape 21"/>
           <p:cNvSpPr/>
           <p:nvPr/>
         </p:nvSpPr>
@@ -6303,16 +8192,70 @@
       </p:sp>
       <p:sp>
         <p:nvSpPr>
+          <p:cNvPr id="24" name="Shape 22"/>
+          <p:cNvSpPr/>
+          <p:nvPr/>
+        </p:nvSpPr>
+        <p:spPr>
+          <a:xfrm>
+            <a:off x="1276634" y="4025737"/>
+            <a:ext cx="71630" cy="71630"/>
+          </a:xfrm>
+          <a:prstGeom prst="diamond">
+            <a:avLst/>
+          </a:prstGeom>
+          <a:solidFill>
+            <a:srgbClr val="1F2937"/>
+          </a:solidFill>
+          <a:ln w="12700">
+            <a:solidFill>
+              <a:srgbClr val="1F2937">
+                <a:alpha val="0"/>
+              </a:srgbClr>
+            </a:solidFill>
+            <a:prstDash val="solid"/>
+          </a:ln>
+        </p:spPr>
+      </p:sp>
+      <p:sp>
+        <p:nvSpPr>
+          <p:cNvPr id="25" name="Shape 23"/>
+          <p:cNvSpPr/>
+          <p:nvPr/>
+        </p:nvSpPr>
+        <p:spPr>
+          <a:xfrm>
+            <a:off x="1225150" y="4126468"/>
+            <a:ext cx="44769" cy="44769"/>
+          </a:xfrm>
+          <a:prstGeom prst="diamond">
+            <a:avLst/>
+          </a:prstGeom>
+          <a:solidFill>
+            <a:srgbClr val="1F2937"/>
+          </a:solidFill>
+          <a:ln w="12700">
+            <a:solidFill>
+              <a:srgbClr val="1F2937">
+                <a:alpha val="0"/>
+              </a:srgbClr>
+            </a:solidFill>
+            <a:prstDash val="solid"/>
+          </a:ln>
+        </p:spPr>
+      </p:sp>
+      <p:sp>
+        <p:nvSpPr>
           <p:cNvPr id="26" name="Shape 24"/>
           <p:cNvSpPr/>
           <p:nvPr/>
         </p:nvSpPr>
         <p:spPr>
-          <a:xfrm rot="10800000">
-            <a:off x="1207740" y="4007084"/>
-            <a:ext cx="170993" cy="202082"/>
-          </a:xfrm>
-          <a:prstGeom prst="pentagon">
+          <a:xfrm>
+            <a:off x="1352741" y="4148852"/>
+            <a:ext cx="49246" cy="49246"/>
+          </a:xfrm>
+          <a:prstGeom prst="diamond">
             <a:avLst/>
           </a:prstGeom>
           <a:solidFill>
@@ -6330,34 +8273,7 @@
       </p:sp>
       <p:sp>
         <p:nvSpPr>
-          <p:cNvPr id="27" name="Shape 25"/>
-          <p:cNvSpPr/>
-          <p:nvPr/>
-        </p:nvSpPr>
-        <p:spPr>
-          <a:xfrm>
-            <a:off x="1276137" y="4044391"/>
-            <a:ext cx="31090" cy="87051"/>
-          </a:xfrm>
-          <a:prstGeom prst="rect">
-            <a:avLst/>
-          </a:prstGeom>
-          <a:solidFill>
-            <a:srgbClr val="FFFFFF"/>
-          </a:solidFill>
-          <a:ln w="12700">
-            <a:solidFill>
-              <a:srgbClr val="FFFFFF">
-                <a:alpha val="0"/>
-              </a:srgbClr>
-            </a:solidFill>
-            <a:prstDash val="solid"/>
-          </a:ln>
-        </p:spPr>
-      </p:sp>
-      <p:sp>
-        <p:nvSpPr>
-          <p:cNvPr id="28" name="Text 26"/>
+          <p:cNvPr id="27" name="Text 25"/>
           <p:cNvSpPr txBox="1"/>
           <p:nvPr/>
         </p:nvSpPr>
@@ -6473,11 +8389,11 @@
             <a:avLst/>
           </a:prstGeom>
           <a:solidFill>
-            <a:srgbClr val="EB4A25"/>
-          </a:solidFill>
-          <a:ln w="12700">
-            <a:solidFill>
-              <a:srgbClr val="EB4A25">
+            <a:srgbClr val="F03A11"/>
+          </a:solidFill>
+          <a:ln w="12700">
+            <a:solidFill>
+              <a:srgbClr val="F03A11">
                 <a:alpha val="0"/>
               </a:srgbClr>
             </a:solidFill>
@@ -6500,11 +8416,11 @@
             <a:avLst/>
           </a:prstGeom>
           <a:solidFill>
-            <a:srgbClr val="C6EB25"/>
-          </a:solidFill>
-          <a:ln w="12700">
-            <a:solidFill>
-              <a:srgbClr val="C6EB25">
+            <a:srgbClr val="C7F015"/>
+          </a:solidFill>
+          <a:ln w="12700">
+            <a:solidFill>
+              <a:srgbClr val="C7F015">
                 <a:alpha val="0"/>
               </a:srgbClr>
             </a:solidFill>
@@ -7712,11 +9628,11 @@
             <a:avLst/>
           </a:prstGeom>
           <a:solidFill>
-            <a:srgbClr val="EB4A25"/>
-          </a:solidFill>
-          <a:ln w="12700">
-            <a:solidFill>
-              <a:srgbClr val="EB4A25">
+            <a:srgbClr val="F03A11"/>
+          </a:solidFill>
+          <a:ln w="12700">
+            <a:solidFill>
+              <a:srgbClr val="F03A11">
                 <a:alpha val="0"/>
               </a:srgbClr>
             </a:solidFill>
@@ -7739,11 +9655,11 @@
             <a:avLst/>
           </a:prstGeom>
           <a:solidFill>
-            <a:srgbClr val="C6EB25"/>
-          </a:solidFill>
-          <a:ln w="12700">
-            <a:solidFill>
-              <a:srgbClr val="C6EB25">
+            <a:srgbClr val="C7F015"/>
+          </a:solidFill>
+          <a:ln w="12700">
+            <a:solidFill>
+              <a:srgbClr val="C7F015">
                 <a:alpha val="0"/>
               </a:srgbClr>
             </a:solidFill>
@@ -7914,11 +9830,11 @@
             <a:avLst/>
           </a:prstGeom>
           <a:solidFill>
-            <a:srgbClr val="EB4A25"/>
-          </a:solidFill>
-          <a:ln w="12700">
-            <a:solidFill>
-              <a:srgbClr val="EB4A25">
+            <a:srgbClr val="F03A11"/>
+          </a:solidFill>
+          <a:ln w="12700">
+            <a:solidFill>
+              <a:srgbClr val="F03A11">
                 <a:alpha val="0"/>
               </a:srgbClr>
             </a:solidFill>
@@ -7941,11 +9857,11 @@
             <a:avLst/>
           </a:prstGeom>
           <a:solidFill>
-            <a:srgbClr val="C6EB25"/>
-          </a:solidFill>
-          <a:ln w="12700">
-            <a:solidFill>
-              <a:srgbClr val="C6EB25">
+            <a:srgbClr val="C7F015"/>
+          </a:solidFill>
+          <a:ln w="12700">
+            <a:solidFill>
+              <a:srgbClr val="C7F015">
                 <a:alpha val="0"/>
               </a:srgbClr>
             </a:solidFill>
@@ -8083,6 +9999,23 @@
               <a:buNone/>
             </a:pPr>
             <a:r>
+              <a:rPr lang="en-US" sz="2200" b="1" dirty="0">
+                <a:solidFill>
+                  <a:srgbClr val="2563EB"/>
+                </a:solidFill>
+                <a:latin typeface="Pretendard" pitchFamily="34" charset="0"/>
+                <a:ea typeface="Pretendard" pitchFamily="34" charset="-122"/>
+                <a:cs typeface="Pretendard" pitchFamily="34" charset="-120"/>
+              </a:rPr>
+              <a:t>- Pattern</a:t>
+            </a:r>
+            <a:pPr algn="l" indent="0" marL="0">
+              <a:lnSpc>
+                <a:spcPct val="120000"/>
+              </a:lnSpc>
+              <a:buNone/>
+            </a:pPr>
+            <a:r>
               <a:rPr lang="en-US" sz="2200" dirty="0">
                 <a:solidFill>
                   <a:srgbClr val="1F2937"/>
@@ -8091,7 +10024,87 @@
                 <a:ea typeface="Pretendard" pitchFamily="34" charset="-122"/>
                 <a:cs typeface="Pretendard" pitchFamily="34" charset="-120"/>
               </a:rPr>
-              <a:t>The explanation remains beside the graph. This is the MDPR-owned numeric storytelling layout for short interpretation text plus quantitative evidence.</a:t>
+              <a:t>  short interpretation text beside quantitative evidence.</a:t>
+            </a:r>
+            <a:endParaRPr lang="en-US" sz="2200" dirty="0"/>
+          </a:p>
+          <a:p>
+            <a:pPr algn="l" indent="0" marL="0">
+              <a:lnSpc>
+                <a:spcPct val="120000"/>
+              </a:lnSpc>
+              <a:buNone/>
+            </a:pPr>
+            <a:r>
+              <a:rPr lang="en-US" sz="2200" b="1" dirty="0">
+                <a:solidFill>
+                  <a:srgbClr val="2563EB"/>
+                </a:solidFill>
+                <a:latin typeface="Pretendard" pitchFamily="34" charset="0"/>
+                <a:ea typeface="Pretendard" pitchFamily="34" charset="-122"/>
+                <a:cs typeface="Pretendard" pitchFamily="34" charset="-120"/>
+              </a:rPr>
+              <a:t>- Owner</a:t>
+            </a:r>
+            <a:endParaRPr lang="en-US" sz="2200" dirty="0"/>
+          </a:p>
+          <a:p>
+            <a:pPr algn="l" indent="0" marL="0">
+              <a:lnSpc>
+                <a:spcPct val="120000"/>
+              </a:lnSpc>
+              <a:buNone/>
+            </a:pPr>
+            <a:r>
+              <a:rPr lang="en-US" sz="2200" dirty="0">
+                <a:solidFill>
+                  <a:srgbClr val="1F2937"/>
+                </a:solidFill>
+                <a:latin typeface="Pretendard" pitchFamily="34" charset="0"/>
+                <a:ea typeface="Pretendard" pitchFamily="34" charset="-122"/>
+                <a:cs typeface="Pretendard" pitchFamily="34" charset="-120"/>
+              </a:rPr>
+              <a:t>  MDPR selects body/chart geometry and typography.</a:t>
+            </a:r>
+            <a:endParaRPr lang="en-US" sz="2200" dirty="0"/>
+          </a:p>
+          <a:p>
+            <a:pPr algn="l" indent="0" marL="0">
+              <a:lnSpc>
+                <a:spcPct val="120000"/>
+              </a:lnSpc>
+              <a:buNone/>
+            </a:pPr>
+            <a:r>
+              <a:rPr lang="en-US" sz="2200" b="1" dirty="0">
+                <a:solidFill>
+                  <a:srgbClr val="2563EB"/>
+                </a:solidFill>
+                <a:latin typeface="Pretendard" pitchFamily="34" charset="0"/>
+                <a:ea typeface="Pretendard" pitchFamily="34" charset="-122"/>
+                <a:cs typeface="Pretendard" pitchFamily="34" charset="-120"/>
+              </a:rPr>
+              <a:t>- Constraint</a:t>
+            </a:r>
+            <a:endParaRPr lang="en-US" sz="2200" dirty="0"/>
+          </a:p>
+          <a:p>
+            <a:pPr algn="l" indent="0" marL="0">
+              <a:lnSpc>
+                <a:spcPct val="120000"/>
+              </a:lnSpc>
+              <a:buNone/>
+            </a:pPr>
+            <a:r>
+              <a:rPr lang="en-US" sz="2200" dirty="0">
+                <a:solidFill>
+                  <a:srgbClr val="1F2937"/>
+                </a:solidFill>
+                <a:latin typeface="Pretendard" pitchFamily="34" charset="0"/>
+                <a:ea typeface="Pretendard" pitchFamily="34" charset="-122"/>
+                <a:cs typeface="Pretendard" pitchFamily="34" charset="-120"/>
+              </a:rPr>
+              <a:t>  text stays compact so the chart keeps visual priority.</a:t>
             </a:r>
             <a:endParaRPr lang="en-US" sz="2200" dirty="0"/>
           </a:p>
@@ -8187,11 +10200,11 @@
             <a:avLst/>
           </a:prstGeom>
           <a:solidFill>
-            <a:srgbClr val="EB4A25"/>
-          </a:solidFill>
-          <a:ln w="12700">
-            <a:solidFill>
-              <a:srgbClr val="EB4A25">
+            <a:srgbClr val="F03A11"/>
+          </a:solidFill>
+          <a:ln w="12700">
+            <a:solidFill>
+              <a:srgbClr val="F03A11">
                 <a:alpha val="0"/>
               </a:srgbClr>
             </a:solidFill>
@@ -8214,11 +10227,11 @@
             <a:avLst/>
           </a:prstGeom>
           <a:solidFill>
-            <a:srgbClr val="C6EB25"/>
-          </a:solidFill>
-          <a:ln w="12700">
-            <a:solidFill>
-              <a:srgbClr val="C6EB25">
+            <a:srgbClr val="C7F015"/>
+          </a:solidFill>
+          <a:ln w="12700">
+            <a:solidFill>
+              <a:srgbClr val="C7F015">
                 <a:alpha val="0"/>
               </a:srgbClr>
             </a:solidFill>
@@ -8707,11 +10720,11 @@
             <a:avLst/>
           </a:prstGeom>
           <a:solidFill>
-            <a:srgbClr val="EB4A25"/>
-          </a:solidFill>
-          <a:ln w="12700">
-            <a:solidFill>
-              <a:srgbClr val="EB4A25">
+            <a:srgbClr val="F03A11"/>
+          </a:solidFill>
+          <a:ln w="12700">
+            <a:solidFill>
+              <a:srgbClr val="F03A11">
                 <a:alpha val="0"/>
               </a:srgbClr>
             </a:solidFill>
@@ -8734,11 +10747,11 @@
             <a:avLst/>
           </a:prstGeom>
           <a:solidFill>
-            <a:srgbClr val="C6EB25"/>
-          </a:solidFill>
-          <a:ln w="12700">
-            <a:solidFill>
-              <a:srgbClr val="C6EB25">
+            <a:srgbClr val="C7F015"/>
+          </a:solidFill>
+          <a:ln w="12700">
+            <a:solidFill>
+              <a:srgbClr val="C7F015">
                 <a:alpha val="0"/>
               </a:srgbClr>
             </a:solidFill>
@@ -8856,30 +10869,736 @@
         </p:nvSpPr>
         <p:spPr>
           <a:xfrm>
-            <a:off x="1936974" y="2098365"/>
-            <a:ext cx="2981310" cy="2981310"/>
-          </a:xfrm>
-          <a:prstGeom prst="ellipse">
-            <a:avLst/>
-          </a:prstGeom>
-          <a:solidFill>
-            <a:srgbClr val="2563EB">
+            <a:off x="3224357" y="2039078"/>
+            <a:ext cx="406542" cy="186332"/>
+          </a:xfrm>
+          <a:prstGeom prst="roundRect">
+            <a:avLst>
+              <a:gd name="adj" fmla="val 14722"/>
+            </a:avLst>
+          </a:prstGeom>
+          <a:solidFill>
+            <a:srgbClr val="2563EB"/>
+          </a:solidFill>
+          <a:ln w="12700">
+            <a:solidFill>
+              <a:srgbClr val="2563EB">
+                <a:alpha val="0"/>
+              </a:srgbClr>
+            </a:solidFill>
+            <a:prstDash val="solid"/>
+          </a:ln>
+        </p:spPr>
+      </p:sp>
+      <p:sp>
+        <p:nvSpPr>
+          <p:cNvPr id="9" name="Shape 7"/>
+          <p:cNvSpPr/>
+          <p:nvPr/>
+        </p:nvSpPr>
+        <p:spPr>
+          <a:xfrm rot="900000">
+            <a:off x="3601399" y="2088716"/>
+            <a:ext cx="406542" cy="186332"/>
+          </a:xfrm>
+          <a:prstGeom prst="roundRect">
+            <a:avLst>
+              <a:gd name="adj" fmla="val 14722"/>
+            </a:avLst>
+          </a:prstGeom>
+          <a:solidFill>
+            <a:srgbClr val="2563EB"/>
+          </a:solidFill>
+          <a:ln w="12700">
+            <a:solidFill>
+              <a:srgbClr val="2563EB">
+                <a:alpha val="0"/>
+              </a:srgbClr>
+            </a:solidFill>
+            <a:prstDash val="solid"/>
+          </a:ln>
+        </p:spPr>
+      </p:sp>
+      <p:sp>
+        <p:nvSpPr>
+          <p:cNvPr id="10" name="Shape 8"/>
+          <p:cNvSpPr/>
+          <p:nvPr/>
+        </p:nvSpPr>
+        <p:spPr>
+          <a:xfrm rot="1800000">
+            <a:off x="3952745" y="2234249"/>
+            <a:ext cx="406542" cy="186332"/>
+          </a:xfrm>
+          <a:prstGeom prst="roundRect">
+            <a:avLst>
+              <a:gd name="adj" fmla="val 14722"/>
+            </a:avLst>
+          </a:prstGeom>
+          <a:solidFill>
+            <a:srgbClr val="2563EB"/>
+          </a:solidFill>
+          <a:ln w="12700">
+            <a:solidFill>
+              <a:srgbClr val="2563EB">
+                <a:alpha val="0"/>
+              </a:srgbClr>
+            </a:solidFill>
+            <a:prstDash val="solid"/>
+          </a:ln>
+        </p:spPr>
+      </p:sp>
+      <p:sp>
+        <p:nvSpPr>
+          <p:cNvPr id="11" name="Shape 9"/>
+          <p:cNvSpPr/>
+          <p:nvPr/>
+        </p:nvSpPr>
+        <p:spPr>
+          <a:xfrm rot="2700000">
+            <a:off x="4254454" y="2465758"/>
+            <a:ext cx="406542" cy="186332"/>
+          </a:xfrm>
+          <a:prstGeom prst="roundRect">
+            <a:avLst>
+              <a:gd name="adj" fmla="val 14722"/>
+            </a:avLst>
+          </a:prstGeom>
+          <a:solidFill>
+            <a:srgbClr val="2563EB"/>
+          </a:solidFill>
+          <a:ln w="12700">
+            <a:solidFill>
+              <a:srgbClr val="2563EB">
+                <a:alpha val="0"/>
+              </a:srgbClr>
+            </a:solidFill>
+            <a:prstDash val="solid"/>
+          </a:ln>
+        </p:spPr>
+      </p:sp>
+      <p:sp>
+        <p:nvSpPr>
+          <p:cNvPr id="12" name="Shape 10"/>
+          <p:cNvSpPr/>
+          <p:nvPr/>
+        </p:nvSpPr>
+        <p:spPr>
+          <a:xfrm rot="3600000">
+            <a:off x="4485963" y="2767466"/>
+            <a:ext cx="406542" cy="186332"/>
+          </a:xfrm>
+          <a:prstGeom prst="roundRect">
+            <a:avLst>
+              <a:gd name="adj" fmla="val 14722"/>
+            </a:avLst>
+          </a:prstGeom>
+          <a:solidFill>
+            <a:srgbClr val="2563EB"/>
+          </a:solidFill>
+          <a:ln w="12700">
+            <a:solidFill>
+              <a:srgbClr val="2563EB">
+                <a:alpha val="0"/>
+              </a:srgbClr>
+            </a:solidFill>
+            <a:prstDash val="solid"/>
+          </a:ln>
+        </p:spPr>
+      </p:sp>
+      <p:sp>
+        <p:nvSpPr>
+          <p:cNvPr id="13" name="Shape 11"/>
+          <p:cNvSpPr/>
+          <p:nvPr/>
+        </p:nvSpPr>
+        <p:spPr>
+          <a:xfrm rot="4500000">
+            <a:off x="4631495" y="3118813"/>
+            <a:ext cx="406542" cy="186332"/>
+          </a:xfrm>
+          <a:prstGeom prst="roundRect">
+            <a:avLst>
+              <a:gd name="adj" fmla="val 14722"/>
+            </a:avLst>
+          </a:prstGeom>
+          <a:solidFill>
+            <a:srgbClr val="2563EB"/>
+          </a:solidFill>
+          <a:ln w="12700">
+            <a:solidFill>
+              <a:srgbClr val="2563EB">
+                <a:alpha val="0"/>
+              </a:srgbClr>
+            </a:solidFill>
+            <a:prstDash val="solid"/>
+          </a:ln>
+        </p:spPr>
+      </p:sp>
+      <p:sp>
+        <p:nvSpPr>
+          <p:cNvPr id="14" name="Shape 12"/>
+          <p:cNvSpPr/>
+          <p:nvPr/>
+        </p:nvSpPr>
+        <p:spPr>
+          <a:xfrm rot="5400000">
+            <a:off x="4681134" y="3495854"/>
+            <a:ext cx="406542" cy="186332"/>
+          </a:xfrm>
+          <a:prstGeom prst="roundRect">
+            <a:avLst>
+              <a:gd name="adj" fmla="val 14722"/>
+            </a:avLst>
+          </a:prstGeom>
+          <a:solidFill>
+            <a:srgbClr val="2563EB"/>
+          </a:solidFill>
+          <a:ln w="12700">
+            <a:solidFill>
+              <a:srgbClr val="2563EB">
+                <a:alpha val="0"/>
+              </a:srgbClr>
+            </a:solidFill>
+            <a:prstDash val="solid"/>
+          </a:ln>
+        </p:spPr>
+      </p:sp>
+      <p:sp>
+        <p:nvSpPr>
+          <p:cNvPr id="15" name="Shape 13"/>
+          <p:cNvSpPr/>
+          <p:nvPr/>
+        </p:nvSpPr>
+        <p:spPr>
+          <a:xfrm rot="6300000">
+            <a:off x="4631495" y="3872896"/>
+            <a:ext cx="406542" cy="186332"/>
+          </a:xfrm>
+          <a:prstGeom prst="roundRect">
+            <a:avLst>
+              <a:gd name="adj" fmla="val 14722"/>
+            </a:avLst>
+          </a:prstGeom>
+          <a:solidFill>
+            <a:srgbClr val="2563EB"/>
+          </a:solidFill>
+          <a:ln w="12700">
+            <a:solidFill>
+              <a:srgbClr val="2563EB">
+                <a:alpha val="0"/>
+              </a:srgbClr>
+            </a:solidFill>
+            <a:prstDash val="solid"/>
+          </a:ln>
+        </p:spPr>
+      </p:sp>
+      <p:sp>
+        <p:nvSpPr>
+          <p:cNvPr id="16" name="Shape 14"/>
+          <p:cNvSpPr/>
+          <p:nvPr/>
+        </p:nvSpPr>
+        <p:spPr>
+          <a:xfrm rot="7200000">
+            <a:off x="4485963" y="4224242"/>
+            <a:ext cx="406542" cy="186332"/>
+          </a:xfrm>
+          <a:prstGeom prst="roundRect">
+            <a:avLst>
+              <a:gd name="adj" fmla="val 14722"/>
+            </a:avLst>
+          </a:prstGeom>
+          <a:solidFill>
+            <a:srgbClr val="2563EB"/>
+          </a:solidFill>
+          <a:ln w="12700">
+            <a:solidFill>
+              <a:srgbClr val="2563EB">
+                <a:alpha val="0"/>
+              </a:srgbClr>
+            </a:solidFill>
+            <a:prstDash val="solid"/>
+          </a:ln>
+        </p:spPr>
+      </p:sp>
+      <p:sp>
+        <p:nvSpPr>
+          <p:cNvPr id="17" name="Shape 15"/>
+          <p:cNvSpPr/>
+          <p:nvPr/>
+        </p:nvSpPr>
+        <p:spPr>
+          <a:xfrm rot="8100000">
+            <a:off x="4254454" y="4525951"/>
+            <a:ext cx="406542" cy="186332"/>
+          </a:xfrm>
+          <a:prstGeom prst="roundRect">
+            <a:avLst>
+              <a:gd name="adj" fmla="val 14722"/>
+            </a:avLst>
+          </a:prstGeom>
+          <a:solidFill>
+            <a:srgbClr val="2563EB"/>
+          </a:solidFill>
+          <a:ln w="12700">
+            <a:solidFill>
+              <a:srgbClr val="2563EB">
+                <a:alpha val="0"/>
+              </a:srgbClr>
+            </a:solidFill>
+            <a:prstDash val="solid"/>
+          </a:ln>
+        </p:spPr>
+      </p:sp>
+      <p:sp>
+        <p:nvSpPr>
+          <p:cNvPr id="18" name="Shape 16"/>
+          <p:cNvSpPr/>
+          <p:nvPr/>
+        </p:nvSpPr>
+        <p:spPr>
+          <a:xfrm rot="9000000">
+            <a:off x="3952745" y="4757459"/>
+            <a:ext cx="406542" cy="186332"/>
+          </a:xfrm>
+          <a:prstGeom prst="roundRect">
+            <a:avLst>
+              <a:gd name="adj" fmla="val 14722"/>
+            </a:avLst>
+          </a:prstGeom>
+          <a:solidFill>
+            <a:srgbClr val="2563EB"/>
+          </a:solidFill>
+          <a:ln w="12700">
+            <a:solidFill>
+              <a:srgbClr val="2563EB">
+                <a:alpha val="0"/>
+              </a:srgbClr>
+            </a:solidFill>
+            <a:prstDash val="solid"/>
+          </a:ln>
+        </p:spPr>
+      </p:sp>
+      <p:sp>
+        <p:nvSpPr>
+          <p:cNvPr id="19" name="Shape 17"/>
+          <p:cNvSpPr/>
+          <p:nvPr/>
+        </p:nvSpPr>
+        <p:spPr>
+          <a:xfrm rot="9900000">
+            <a:off x="3601399" y="4902992"/>
+            <a:ext cx="406542" cy="186332"/>
+          </a:xfrm>
+          <a:prstGeom prst="roundRect">
+            <a:avLst>
+              <a:gd name="adj" fmla="val 14722"/>
+            </a:avLst>
+          </a:prstGeom>
+          <a:solidFill>
+            <a:srgbClr val="2563EB"/>
+          </a:solidFill>
+          <a:ln w="12700">
+            <a:solidFill>
+              <a:srgbClr val="2563EB">
+                <a:alpha val="0"/>
+              </a:srgbClr>
+            </a:solidFill>
+            <a:prstDash val="solid"/>
+          </a:ln>
+        </p:spPr>
+      </p:sp>
+      <p:sp>
+        <p:nvSpPr>
+          <p:cNvPr id="20" name="Shape 18"/>
+          <p:cNvSpPr/>
+          <p:nvPr/>
+        </p:nvSpPr>
+        <p:spPr>
+          <a:xfrm rot="10800000">
+            <a:off x="3224357" y="4952630"/>
+            <a:ext cx="406542" cy="186332"/>
+          </a:xfrm>
+          <a:prstGeom prst="roundRect">
+            <a:avLst>
+              <a:gd name="adj" fmla="val 14722"/>
+            </a:avLst>
+          </a:prstGeom>
+          <a:solidFill>
+            <a:srgbClr val="2563EB"/>
+          </a:solidFill>
+          <a:ln w="12700">
+            <a:solidFill>
+              <a:srgbClr val="2563EB">
+                <a:alpha val="0"/>
+              </a:srgbClr>
+            </a:solidFill>
+            <a:prstDash val="solid"/>
+          </a:ln>
+        </p:spPr>
+      </p:sp>
+      <p:sp>
+        <p:nvSpPr>
+          <p:cNvPr id="21" name="Shape 19"/>
+          <p:cNvSpPr/>
+          <p:nvPr/>
+        </p:nvSpPr>
+        <p:spPr>
+          <a:xfrm rot="11700000">
+            <a:off x="2847316" y="4902992"/>
+            <a:ext cx="406542" cy="186332"/>
+          </a:xfrm>
+          <a:prstGeom prst="roundRect">
+            <a:avLst>
+              <a:gd name="adj" fmla="val 14722"/>
+            </a:avLst>
+          </a:prstGeom>
+          <a:solidFill>
+            <a:srgbClr val="2563EB"/>
+          </a:solidFill>
+          <a:ln w="12700">
+            <a:solidFill>
+              <a:srgbClr val="2563EB">
+                <a:alpha val="0"/>
+              </a:srgbClr>
+            </a:solidFill>
+            <a:prstDash val="solid"/>
+          </a:ln>
+        </p:spPr>
+      </p:sp>
+      <p:sp>
+        <p:nvSpPr>
+          <p:cNvPr id="22" name="Shape 20"/>
+          <p:cNvSpPr/>
+          <p:nvPr/>
+        </p:nvSpPr>
+        <p:spPr>
+          <a:xfrm rot="12600000">
+            <a:off x="2495969" y="4757459"/>
+            <a:ext cx="406542" cy="186332"/>
+          </a:xfrm>
+          <a:prstGeom prst="roundRect">
+            <a:avLst>
+              <a:gd name="adj" fmla="val 14722"/>
+            </a:avLst>
+          </a:prstGeom>
+          <a:solidFill>
+            <a:srgbClr val="2563EB"/>
+          </a:solidFill>
+          <a:ln w="12700">
+            <a:solidFill>
+              <a:srgbClr val="2563EB">
+                <a:alpha val="0"/>
+              </a:srgbClr>
+            </a:solidFill>
+            <a:prstDash val="solid"/>
+          </a:ln>
+        </p:spPr>
+      </p:sp>
+      <p:sp>
+        <p:nvSpPr>
+          <p:cNvPr id="23" name="Shape 21"/>
+          <p:cNvSpPr/>
+          <p:nvPr/>
+        </p:nvSpPr>
+        <p:spPr>
+          <a:xfrm rot="13500000">
+            <a:off x="2194261" y="4525951"/>
+            <a:ext cx="406542" cy="186332"/>
+          </a:xfrm>
+          <a:prstGeom prst="roundRect">
+            <a:avLst>
+              <a:gd name="adj" fmla="val 14722"/>
+            </a:avLst>
+          </a:prstGeom>
+          <a:solidFill>
+            <a:srgbClr val="2563EB"/>
+          </a:solidFill>
+          <a:ln w="12700">
+            <a:solidFill>
+              <a:srgbClr val="2563EB">
+                <a:alpha val="0"/>
+              </a:srgbClr>
+            </a:solidFill>
+            <a:prstDash val="solid"/>
+          </a:ln>
+        </p:spPr>
+      </p:sp>
+      <p:sp>
+        <p:nvSpPr>
+          <p:cNvPr id="24" name="Shape 22"/>
+          <p:cNvSpPr/>
+          <p:nvPr/>
+        </p:nvSpPr>
+        <p:spPr>
+          <a:xfrm rot="14400000">
+            <a:off x="1962752" y="4224242"/>
+            <a:ext cx="406542" cy="186332"/>
+          </a:xfrm>
+          <a:prstGeom prst="roundRect">
+            <a:avLst>
+              <a:gd name="adj" fmla="val 14722"/>
+            </a:avLst>
+          </a:prstGeom>
+          <a:solidFill>
+            <a:srgbClr val="2563EB"/>
+          </a:solidFill>
+          <a:ln w="12700">
+            <a:solidFill>
+              <a:srgbClr val="2563EB">
+                <a:alpha val="0"/>
+              </a:srgbClr>
+            </a:solidFill>
+            <a:prstDash val="solid"/>
+          </a:ln>
+        </p:spPr>
+      </p:sp>
+      <p:sp>
+        <p:nvSpPr>
+          <p:cNvPr id="25" name="Shape 23"/>
+          <p:cNvSpPr/>
+          <p:nvPr/>
+        </p:nvSpPr>
+        <p:spPr>
+          <a:xfrm rot="15300000">
+            <a:off x="1817219" y="3872896"/>
+            <a:ext cx="406542" cy="186332"/>
+          </a:xfrm>
+          <a:prstGeom prst="roundRect">
+            <a:avLst>
+              <a:gd name="adj" fmla="val 14722"/>
+            </a:avLst>
+          </a:prstGeom>
+          <a:solidFill>
+            <a:srgbClr val="C6CBDA">
               <a:alpha val="92000"/>
             </a:srgbClr>
           </a:solidFill>
           <a:ln w="12700">
             <a:solidFill>
-              <a:srgbClr val="2563EB">
-                <a:alpha val="0"/>
-              </a:srgbClr>
-            </a:solidFill>
-            <a:prstDash val="solid"/>
-          </a:ln>
-        </p:spPr>
-      </p:sp>
-      <p:sp>
-        <p:nvSpPr>
-          <p:cNvPr id="9" name="Shape 7"/>
+              <a:srgbClr val="C6CBDA">
+                <a:alpha val="0"/>
+              </a:srgbClr>
+            </a:solidFill>
+            <a:prstDash val="solid"/>
+          </a:ln>
+        </p:spPr>
+      </p:sp>
+      <p:sp>
+        <p:nvSpPr>
+          <p:cNvPr id="26" name="Shape 24"/>
+          <p:cNvSpPr/>
+          <p:nvPr/>
+        </p:nvSpPr>
+        <p:spPr>
+          <a:xfrm rot="16200000">
+            <a:off x="1767581" y="3495854"/>
+            <a:ext cx="406542" cy="186332"/>
+          </a:xfrm>
+          <a:prstGeom prst="roundRect">
+            <a:avLst>
+              <a:gd name="adj" fmla="val 14722"/>
+            </a:avLst>
+          </a:prstGeom>
+          <a:solidFill>
+            <a:srgbClr val="C6CBDA">
+              <a:alpha val="92000"/>
+            </a:srgbClr>
+          </a:solidFill>
+          <a:ln w="12700">
+            <a:solidFill>
+              <a:srgbClr val="C6CBDA">
+                <a:alpha val="0"/>
+              </a:srgbClr>
+            </a:solidFill>
+            <a:prstDash val="solid"/>
+          </a:ln>
+        </p:spPr>
+      </p:sp>
+      <p:sp>
+        <p:nvSpPr>
+          <p:cNvPr id="27" name="Shape 25"/>
+          <p:cNvSpPr/>
+          <p:nvPr/>
+        </p:nvSpPr>
+        <p:spPr>
+          <a:xfrm rot="17100000">
+            <a:off x="1817219" y="3118813"/>
+            <a:ext cx="406542" cy="186332"/>
+          </a:xfrm>
+          <a:prstGeom prst="roundRect">
+            <a:avLst>
+              <a:gd name="adj" fmla="val 14722"/>
+            </a:avLst>
+          </a:prstGeom>
+          <a:solidFill>
+            <a:srgbClr val="C6CBDA">
+              <a:alpha val="92000"/>
+            </a:srgbClr>
+          </a:solidFill>
+          <a:ln w="12700">
+            <a:solidFill>
+              <a:srgbClr val="C6CBDA">
+                <a:alpha val="0"/>
+              </a:srgbClr>
+            </a:solidFill>
+            <a:prstDash val="solid"/>
+          </a:ln>
+        </p:spPr>
+      </p:sp>
+      <p:sp>
+        <p:nvSpPr>
+          <p:cNvPr id="28" name="Shape 26"/>
+          <p:cNvSpPr/>
+          <p:nvPr/>
+        </p:nvSpPr>
+        <p:spPr>
+          <a:xfrm rot="18000000">
+            <a:off x="1962752" y="2767466"/>
+            <a:ext cx="406542" cy="186332"/>
+          </a:xfrm>
+          <a:prstGeom prst="roundRect">
+            <a:avLst>
+              <a:gd name="adj" fmla="val 14722"/>
+            </a:avLst>
+          </a:prstGeom>
+          <a:solidFill>
+            <a:srgbClr val="C6CBDA">
+              <a:alpha val="92000"/>
+            </a:srgbClr>
+          </a:solidFill>
+          <a:ln w="12700">
+            <a:solidFill>
+              <a:srgbClr val="C6CBDA">
+                <a:alpha val="0"/>
+              </a:srgbClr>
+            </a:solidFill>
+            <a:prstDash val="solid"/>
+          </a:ln>
+        </p:spPr>
+      </p:sp>
+      <p:sp>
+        <p:nvSpPr>
+          <p:cNvPr id="29" name="Shape 27"/>
+          <p:cNvSpPr/>
+          <p:nvPr/>
+        </p:nvSpPr>
+        <p:spPr>
+          <a:xfrm rot="18900000">
+            <a:off x="2194261" y="2465758"/>
+            <a:ext cx="406542" cy="186332"/>
+          </a:xfrm>
+          <a:prstGeom prst="roundRect">
+            <a:avLst>
+              <a:gd name="adj" fmla="val 14722"/>
+            </a:avLst>
+          </a:prstGeom>
+          <a:solidFill>
+            <a:srgbClr val="C6CBDA">
+              <a:alpha val="92000"/>
+            </a:srgbClr>
+          </a:solidFill>
+          <a:ln w="12700">
+            <a:solidFill>
+              <a:srgbClr val="C6CBDA">
+                <a:alpha val="0"/>
+              </a:srgbClr>
+            </a:solidFill>
+            <a:prstDash val="solid"/>
+          </a:ln>
+        </p:spPr>
+      </p:sp>
+      <p:sp>
+        <p:nvSpPr>
+          <p:cNvPr id="30" name="Shape 28"/>
+          <p:cNvSpPr/>
+          <p:nvPr/>
+        </p:nvSpPr>
+        <p:spPr>
+          <a:xfrm rot="19800000">
+            <a:off x="2495969" y="2234249"/>
+            <a:ext cx="406542" cy="186332"/>
+          </a:xfrm>
+          <a:prstGeom prst="roundRect">
+            <a:avLst>
+              <a:gd name="adj" fmla="val 14722"/>
+            </a:avLst>
+          </a:prstGeom>
+          <a:solidFill>
+            <a:srgbClr val="C6CBDA">
+              <a:alpha val="92000"/>
+            </a:srgbClr>
+          </a:solidFill>
+          <a:ln w="12700">
+            <a:solidFill>
+              <a:srgbClr val="C6CBDA">
+                <a:alpha val="0"/>
+              </a:srgbClr>
+            </a:solidFill>
+            <a:prstDash val="solid"/>
+          </a:ln>
+        </p:spPr>
+      </p:sp>
+      <p:sp>
+        <p:nvSpPr>
+          <p:cNvPr id="31" name="Shape 29"/>
+          <p:cNvSpPr/>
+          <p:nvPr/>
+        </p:nvSpPr>
+        <p:spPr>
+          <a:xfrm rot="20700000">
+            <a:off x="2847316" y="2088716"/>
+            <a:ext cx="406542" cy="186332"/>
+          </a:xfrm>
+          <a:prstGeom prst="roundRect">
+            <a:avLst>
+              <a:gd name="adj" fmla="val 14722"/>
+            </a:avLst>
+          </a:prstGeom>
+          <a:solidFill>
+            <a:srgbClr val="C6CBDA">
+              <a:alpha val="92000"/>
+            </a:srgbClr>
+          </a:solidFill>
+          <a:ln w="12700">
+            <a:solidFill>
+              <a:srgbClr val="C6CBDA">
+                <a:alpha val="0"/>
+              </a:srgbClr>
+            </a:solidFill>
+            <a:prstDash val="solid"/>
+          </a:ln>
+        </p:spPr>
+      </p:sp>
+      <p:sp>
+        <p:nvSpPr>
+          <p:cNvPr id="32" name="Shape 30"/>
+          <p:cNvSpPr/>
+          <p:nvPr/>
+        </p:nvSpPr>
+        <p:spPr>
+          <a:xfrm>
+            <a:off x="1901916" y="3847487"/>
+            <a:ext cx="237150" cy="237150"/>
+          </a:xfrm>
+          <a:prstGeom prst="ellipse">
+            <a:avLst/>
+          </a:prstGeom>
+          <a:solidFill>
+            <a:srgbClr val="F03A11"/>
+          </a:solidFill>
+          <a:ln w="12700">
+            <a:solidFill>
+              <a:srgbClr val="FFFFFF"/>
+            </a:solidFill>
+            <a:prstDash val="solid"/>
+          </a:ln>
+        </p:spPr>
+      </p:sp>
+      <p:sp>
+        <p:nvSpPr>
+          <p:cNvPr id="33" name="Shape 31"/>
           <p:cNvSpPr/>
           <p:nvPr/>
         </p:nvSpPr>
@@ -8906,94 +11625,7 @@
       </p:sp>
       <p:sp>
         <p:nvSpPr>
-          <p:cNvPr id="10" name="Shape 8"/>
-          <p:cNvSpPr/>
-          <p:nvPr/>
-        </p:nvSpPr>
-        <p:spPr>
-          <a:xfrm rot="1200000">
-            <a:off x="3489924" y="2203456"/>
-            <a:ext cx="779206" cy="287967"/>
-          </a:xfrm>
-          <a:prstGeom prst="roundRect">
-            <a:avLst>
-              <a:gd name="adj" fmla="val 12701"/>
-            </a:avLst>
-          </a:prstGeom>
-          <a:solidFill>
-            <a:srgbClr val="EB4A25"/>
-          </a:solidFill>
-          <a:ln w="12700">
-            <a:solidFill>
-              <a:srgbClr val="EB4A25">
-                <a:alpha val="0"/>
-              </a:srgbClr>
-            </a:solidFill>
-            <a:prstDash val="solid"/>
-          </a:ln>
-        </p:spPr>
-      </p:sp>
-      <p:sp>
-        <p:nvSpPr>
-          <p:cNvPr id="11" name="Shape 9"/>
-          <p:cNvSpPr/>
-          <p:nvPr/>
-        </p:nvSpPr>
-        <p:spPr>
-          <a:xfrm rot="3360000">
-            <a:off x="4133401" y="2706196"/>
-            <a:ext cx="779206" cy="287967"/>
-          </a:xfrm>
-          <a:prstGeom prst="roundRect">
-            <a:avLst>
-              <a:gd name="adj" fmla="val 12701"/>
-            </a:avLst>
-          </a:prstGeom>
-          <a:solidFill>
-            <a:srgbClr val="EB4A25"/>
-          </a:solidFill>
-          <a:ln w="12700">
-            <a:solidFill>
-              <a:srgbClr val="EB4A25">
-                <a:alpha val="0"/>
-              </a:srgbClr>
-            </a:solidFill>
-            <a:prstDash val="solid"/>
-          </a:ln>
-        </p:spPr>
-      </p:sp>
-      <p:sp>
-        <p:nvSpPr>
-          <p:cNvPr id="12" name="Shape 10"/>
-          <p:cNvSpPr/>
-          <p:nvPr/>
-        </p:nvSpPr>
-        <p:spPr>
-          <a:xfrm rot="5520000">
-            <a:off x="4358483" y="3491148"/>
-            <a:ext cx="779206" cy="287967"/>
-          </a:xfrm>
-          <a:prstGeom prst="roundRect">
-            <a:avLst>
-              <a:gd name="adj" fmla="val 12701"/>
-            </a:avLst>
-          </a:prstGeom>
-          <a:solidFill>
-            <a:srgbClr val="EB4A25"/>
-          </a:solidFill>
-          <a:ln w="12700">
-            <a:solidFill>
-              <a:srgbClr val="EB4A25">
-                <a:alpha val="0"/>
-              </a:srgbClr>
-            </a:solidFill>
-            <a:prstDash val="solid"/>
-          </a:ln>
-        </p:spPr>
-      </p:sp>
-      <p:sp>
-        <p:nvSpPr>
-          <p:cNvPr id="13" name="Text 11"/>
+          <p:cNvPr id="34" name="Text 32"/>
           <p:cNvSpPr txBox="1"/>
           <p:nvPr/>
         </p:nvSpPr>
@@ -9037,7 +11669,7 @@
       </p:sp>
       <p:sp>
         <p:nvSpPr>
-          <p:cNvPr id="14" name="Text 12"/>
+          <p:cNvPr id="35" name="Text 33"/>
           <p:cNvSpPr txBox="1"/>
           <p:nvPr/>
         </p:nvSpPr>
@@ -9081,7 +11713,7 @@
       </p:sp>
       <p:sp>
         <p:nvSpPr>
-          <p:cNvPr id="15" name="Shape 13"/>
+          <p:cNvPr id="36" name="Shape 34"/>
           <p:cNvSpPr/>
           <p:nvPr/>
         </p:nvSpPr>
@@ -9108,7 +11740,7 @@
       </p:sp>
       <p:sp>
         <p:nvSpPr>
-          <p:cNvPr id="16" name="Text 14"/>
+          <p:cNvPr id="37" name="Text 35"/>
           <p:cNvSpPr txBox="1"/>
           <p:nvPr/>
         </p:nvSpPr>
@@ -9152,7 +11784,7 @@
       </p:sp>
       <p:sp>
         <p:nvSpPr>
-          <p:cNvPr id="17" name="Shape 15"/>
+          <p:cNvPr id="38" name="Shape 36"/>
           <p:cNvSpPr/>
           <p:nvPr/>
         </p:nvSpPr>
@@ -9165,21 +11797,21 @@
             <a:avLst/>
           </a:prstGeom>
           <a:solidFill>
-            <a:srgbClr val="EB4A25"/>
-          </a:solidFill>
-          <a:ln w="12700">
-            <a:solidFill>
-              <a:srgbClr val="EB4A25">
-                <a:alpha val="0"/>
-              </a:srgbClr>
-            </a:solidFill>
-            <a:prstDash val="solid"/>
-          </a:ln>
-        </p:spPr>
-      </p:sp>
-      <p:sp>
-        <p:nvSpPr>
-          <p:cNvPr id="18" name="Text 16"/>
+            <a:srgbClr val="F03A11"/>
+          </a:solidFill>
+          <a:ln w="12700">
+            <a:solidFill>
+              <a:srgbClr val="F03A11">
+                <a:alpha val="0"/>
+              </a:srgbClr>
+            </a:solidFill>
+            <a:prstDash val="solid"/>
+          </a:ln>
+        </p:spPr>
+      </p:sp>
+      <p:sp>
+        <p:nvSpPr>
+          <p:cNvPr id="39" name="Text 37"/>
           <p:cNvSpPr txBox="1"/>
           <p:nvPr/>
         </p:nvSpPr>
@@ -9249,25 +11881,25 @@
         <a:srgbClr val="2563EB"/>
       </a:accent1>
       <a:accent2>
-        <a:srgbClr val="EB4A25"/>
+        <a:srgbClr val="F03A11"/>
       </a:accent2>
       <a:accent3>
-        <a:srgbClr val="C6EB25"/>
+        <a:srgbClr val="C7F015"/>
       </a:accent3>
       <a:accent4>
-        <a:srgbClr val="25C6EB"/>
+        <a:srgbClr val="3ACAEB"/>
       </a:accent4>
       <a:accent5>
-        <a:srgbClr val="4A25EB"/>
+        <a:srgbClr val="3E18E4"/>
       </a:accent5>
       <a:accent6>
-        <a:srgbClr val="C6CBDA"/>
+        <a:srgbClr val="0A3CAA"/>
       </a:accent6>
       <a:hlink>
         <a:srgbClr val="2563EB"/>
       </a:hlink>
       <a:folHlink>
-        <a:srgbClr val="EB4A25"/>
+        <a:srgbClr val="F03A11"/>
       </a:folHlink>
     </a:clrScheme>
     <a:fontScheme name="Office">
